--- a/public/lessons/year-6-maths/summer/week-28/solve-statistical-problems/teaching-powerpoint-v1.pptx
+++ b/public/lessons/year-6-maths/summer/week-28/solve-statistical-problems/teaching-powerpoint-v1.pptx
@@ -2,24 +2,24 @@
 <file path=ppt/presentation.xml><?xml version="1.0" encoding="utf-8"?>
 <p:presentation xmlns:p="http://schemas.openxmlformats.org/presentationml/2006/main">
   <p:sldMasterIdLst>
-    <p:sldMasterId xmlns:r="http://schemas.openxmlformats.org/officeDocument/2006/relationships" id="2147483648" r:id="Rb58d6b05127b4390"/>
+    <p:sldMasterId xmlns:r="http://schemas.openxmlformats.org/officeDocument/2006/relationships" id="2147483648" r:id="R5ef8f01c0d7d4000"/>
   </p:sldMasterIdLst>
   <p:notesMasterIdLst>
-    <p:notesMasterId xmlns:r="http://schemas.openxmlformats.org/officeDocument/2006/relationships" r:id="R521a231594a547e9"/>
+    <p:notesMasterId xmlns:r="http://schemas.openxmlformats.org/officeDocument/2006/relationships" r:id="Rcd3304c3118c4c6a"/>
   </p:notesMasterIdLst>
   <p:sldIdLst>
-    <p:sldId xmlns:r="http://schemas.openxmlformats.org/officeDocument/2006/relationships" id="256" r:id="Ra18ac0f5ea604b7c"/>
-    <p:sldId xmlns:r="http://schemas.openxmlformats.org/officeDocument/2006/relationships" id="257" r:id="Rd1cb4f9db56c4ff9"/>
-    <p:sldId xmlns:r="http://schemas.openxmlformats.org/officeDocument/2006/relationships" id="258" r:id="Rc42ca4f7bd2043a4"/>
-    <p:sldId xmlns:r="http://schemas.openxmlformats.org/officeDocument/2006/relationships" id="259" r:id="R715dc02f3cc94ac1"/>
-    <p:sldId xmlns:r="http://schemas.openxmlformats.org/officeDocument/2006/relationships" id="260" r:id="R43010a8cd6c64ff2"/>
-    <p:sldId xmlns:r="http://schemas.openxmlformats.org/officeDocument/2006/relationships" id="261" r:id="R378a5507dc6f4bed"/>
-    <p:sldId xmlns:r="http://schemas.openxmlformats.org/officeDocument/2006/relationships" id="262" r:id="R9913a2415f7b4b01"/>
-    <p:sldId xmlns:r="http://schemas.openxmlformats.org/officeDocument/2006/relationships" id="263" r:id="R3b8e3c58438c4181"/>
-    <p:sldId xmlns:r="http://schemas.openxmlformats.org/officeDocument/2006/relationships" id="264" r:id="Re4182dff50074ecc"/>
-    <p:sldId xmlns:r="http://schemas.openxmlformats.org/officeDocument/2006/relationships" id="265" r:id="Rd09ba7f318b24162"/>
-    <p:sldId xmlns:r="http://schemas.openxmlformats.org/officeDocument/2006/relationships" id="266" r:id="R66059c40e85f4423"/>
-    <p:sldId xmlns:r="http://schemas.openxmlformats.org/officeDocument/2006/relationships" id="267" r:id="R4a48b26a62324985"/>
+    <p:sldId xmlns:r="http://schemas.openxmlformats.org/officeDocument/2006/relationships" id="256" r:id="Rf32de425da8a4fec"/>
+    <p:sldId xmlns:r="http://schemas.openxmlformats.org/officeDocument/2006/relationships" id="257" r:id="R0feb5ad7ab2b4a22"/>
+    <p:sldId xmlns:r="http://schemas.openxmlformats.org/officeDocument/2006/relationships" id="258" r:id="R103c75d009e44f92"/>
+    <p:sldId xmlns:r="http://schemas.openxmlformats.org/officeDocument/2006/relationships" id="259" r:id="R1ac7d491d2d44b8d"/>
+    <p:sldId xmlns:r="http://schemas.openxmlformats.org/officeDocument/2006/relationships" id="260" r:id="Rc9669b92e5864b55"/>
+    <p:sldId xmlns:r="http://schemas.openxmlformats.org/officeDocument/2006/relationships" id="261" r:id="R5126d9196b244f1b"/>
+    <p:sldId xmlns:r="http://schemas.openxmlformats.org/officeDocument/2006/relationships" id="262" r:id="R1fa48ae0523f4de5"/>
+    <p:sldId xmlns:r="http://schemas.openxmlformats.org/officeDocument/2006/relationships" id="263" r:id="R444ddd03b84a4290"/>
+    <p:sldId xmlns:r="http://schemas.openxmlformats.org/officeDocument/2006/relationships" id="264" r:id="R0b1110de8fdc4b7f"/>
+    <p:sldId xmlns:r="http://schemas.openxmlformats.org/officeDocument/2006/relationships" id="265" r:id="Rd1e08c1250114c6f"/>
+    <p:sldId xmlns:r="http://schemas.openxmlformats.org/officeDocument/2006/relationships" id="266" r:id="R48d8f74b59c64001"/>
+    <p:sldId xmlns:r="http://schemas.openxmlformats.org/officeDocument/2006/relationships" id="267" r:id="R34964bb3e5ca44f1"/>
   </p:sldIdLst>
   <p:sldSz cx="12192000" cy="6858000"/>
   <p:notesSz cx="6858000" cy="9144000"/>
@@ -873,7 +873,7 @@
           <a:lstStyle xmlns:a="http://schemas.openxmlformats.org/drawingml/2006/main"/>
           <a:p xmlns:a="http://schemas.openxmlformats.org/drawingml/2006/main">
             <a:r>
-              <a:t>I do. Reveal the question, setup and each calculation stage one click at a time. Pupils watch before copying. Model answer: Dataset A: 24; Dataset B: 23, so A is greater.</a:t>
+              <a:t>I do. Reveal the question, then reveal each mathematical change one click at a time. Point to the numbers and operation that changed before moving to the next line. Final answer: Dataset A: 24; Dataset B: 23, so A is greater.</a:t>
             </a:r>
           </a:p>
         </p:txBody>
@@ -1291,7 +1291,7 @@
   </p:cSld>
   <p:clrMap bg1="lt1" tx1="dk1" bg2="lt2" tx2="dk2" accent1="accent1" accent2="accent2" accent3="accent3" accent4="accent4" accent5="accent5" accent6="accent6" hlink="hlink" folHlink="folHlink"/>
   <p:sldLayoutIdLst>
-    <p:sldLayoutId xmlns:r="http://schemas.openxmlformats.org/officeDocument/2006/relationships" id="2147483649" r:id="R8d5f247a07224d97"/>
+    <p:sldLayoutId xmlns:r="http://schemas.openxmlformats.org/officeDocument/2006/relationships" id="2147483649" r:id="Rae5650a3e65240fb"/>
   </p:sldLayoutIdLst>
   <p:txStyles>
     <p:titleStyle>
@@ -1842,7 +1842,7 @@
           <p:cNvPr id="12" name="">
             <a:extLst xmlns:a="http://schemas.openxmlformats.org/drawingml/2006/main">
               <a:ext uri="{FF2B5EF4-FFF2-40B4-BE49-F238E27FC236}">
-                <a16:creationId xmlns:a16="http://schemas.microsoft.com/office/drawing/2014/main" id="{3ED7A5B2-F77D-44B3-B16E-795FBC6D5F11}"/>
+                <a16:creationId xmlns:a16="http://schemas.microsoft.com/office/drawing/2014/main" id="{24F1018F-E81D-470F-A0B9-6257ABCD19E6}"/>
               </a:ext>
             </a:extLst>
           </p:cNvPr>
@@ -1874,7 +1874,7 @@
           <p:cNvPr id="2" name="">
             <a:extLst xmlns:a="http://schemas.openxmlformats.org/drawingml/2006/main">
               <a:ext uri="{FF2B5EF4-FFF2-40B4-BE49-F238E27FC236}">
-                <a16:creationId xmlns:a16="http://schemas.microsoft.com/office/drawing/2014/main" id="{E2D30ECF-DEE2-44C8-B49F-6CC4F1DEDF68}"/>
+                <a16:creationId xmlns:a16="http://schemas.microsoft.com/office/drawing/2014/main" id="{69B20458-7A6A-46FD-ABFF-0E923191E64C}"/>
               </a:ext>
             </a:extLst>
           </p:cNvPr>
@@ -1931,7 +1931,7 @@
           <p:cNvPr id="3" name="">
             <a:extLst xmlns:a="http://schemas.openxmlformats.org/drawingml/2006/main">
               <a:ext uri="{FF2B5EF4-FFF2-40B4-BE49-F238E27FC236}">
-                <a16:creationId xmlns:a16="http://schemas.microsoft.com/office/drawing/2014/main" id="{E107BFEA-7ACB-4A33-82AB-E4651FD40799}"/>
+                <a16:creationId xmlns:a16="http://schemas.microsoft.com/office/drawing/2014/main" id="{2094C12A-0A22-4719-B4FF-8AE987436BEE}"/>
               </a:ext>
             </a:extLst>
           </p:cNvPr>
@@ -1965,7 +1965,7 @@
           <p:cNvPr id="4" name="">
             <a:extLst xmlns:a="http://schemas.openxmlformats.org/drawingml/2006/main">
               <a:ext uri="{FF2B5EF4-FFF2-40B4-BE49-F238E27FC236}">
-                <a16:creationId xmlns:a16="http://schemas.microsoft.com/office/drawing/2014/main" id="{C6B31CFA-4A50-44CB-A894-D8F1DEF7519E}"/>
+                <a16:creationId xmlns:a16="http://schemas.microsoft.com/office/drawing/2014/main" id="{3FC31EC9-9EE5-45CB-9BAD-832AD5AAB77A}"/>
               </a:ext>
             </a:extLst>
           </p:cNvPr>
@@ -2022,7 +2022,7 @@
           <p:cNvPr id="5" name="">
             <a:extLst xmlns:a="http://schemas.openxmlformats.org/drawingml/2006/main">
               <a:ext uri="{FF2B5EF4-FFF2-40B4-BE49-F238E27FC236}">
-                <a16:creationId xmlns:a16="http://schemas.microsoft.com/office/drawing/2014/main" id="{E70D63ED-691D-4B37-B034-A747F7176B5F}"/>
+                <a16:creationId xmlns:a16="http://schemas.microsoft.com/office/drawing/2014/main" id="{F0683EA3-63AD-439F-803C-284C705549A2}"/>
               </a:ext>
             </a:extLst>
           </p:cNvPr>
@@ -2079,7 +2079,7 @@
           <p:cNvPr id="6" name="">
             <a:extLst xmlns:a="http://schemas.openxmlformats.org/drawingml/2006/main">
               <a:ext uri="{FF2B5EF4-FFF2-40B4-BE49-F238E27FC236}">
-                <a16:creationId xmlns:a16="http://schemas.microsoft.com/office/drawing/2014/main" id="{6A8DC792-BF57-4124-985B-C00B0D23A76C}"/>
+                <a16:creationId xmlns:a16="http://schemas.microsoft.com/office/drawing/2014/main" id="{8AA1C5CA-DA7B-4517-9720-64D8B7AA1DD2}"/>
               </a:ext>
             </a:extLst>
           </p:cNvPr>
@@ -2113,7 +2113,7 @@
           <p:cNvPr id="7" name="">
             <a:extLst xmlns:a="http://schemas.openxmlformats.org/drawingml/2006/main">
               <a:ext uri="{FF2B5EF4-FFF2-40B4-BE49-F238E27FC236}">
-                <a16:creationId xmlns:a16="http://schemas.microsoft.com/office/drawing/2014/main" id="{4C949B2C-0B0F-4DD7-AF57-CD694F61A0DA}"/>
+                <a16:creationId xmlns:a16="http://schemas.microsoft.com/office/drawing/2014/main" id="{5F9E4612-098C-40A7-AE7C-266FEF3693F6}"/>
               </a:ext>
             </a:extLst>
           </p:cNvPr>
@@ -2170,7 +2170,7 @@
           <p:cNvPr id="8" name="">
             <a:extLst xmlns:a="http://schemas.openxmlformats.org/drawingml/2006/main">
               <a:ext uri="{FF2B5EF4-FFF2-40B4-BE49-F238E27FC236}">
-                <a16:creationId xmlns:a16="http://schemas.microsoft.com/office/drawing/2014/main" id="{2EC5564D-6278-430F-A52E-C486951DA8D8}"/>
+                <a16:creationId xmlns:a16="http://schemas.microsoft.com/office/drawing/2014/main" id="{D275CB7E-7073-4205-9F64-D4F3D8CF1F38}"/>
               </a:ext>
             </a:extLst>
           </p:cNvPr>
@@ -2227,7 +2227,7 @@
           <p:cNvPr id="9" name="">
             <a:extLst xmlns:a="http://schemas.openxmlformats.org/drawingml/2006/main">
               <a:ext uri="{FF2B5EF4-FFF2-40B4-BE49-F238E27FC236}">
-                <a16:creationId xmlns:a16="http://schemas.microsoft.com/office/drawing/2014/main" id="{2445E981-8815-4DCB-BAA7-8DC22D2C66D9}"/>
+                <a16:creationId xmlns:a16="http://schemas.microsoft.com/office/drawing/2014/main" id="{BB24A7E5-60CE-49EB-87D6-16644BD45D07}"/>
               </a:ext>
             </a:extLst>
           </p:cNvPr>
@@ -2284,7 +2284,7 @@
           <p:cNvPr id="10" name="">
             <a:extLst xmlns:a="http://schemas.openxmlformats.org/drawingml/2006/main">
               <a:ext uri="{FF2B5EF4-FFF2-40B4-BE49-F238E27FC236}">
-                <a16:creationId xmlns:a16="http://schemas.microsoft.com/office/drawing/2014/main" id="{F0EB6A0B-081D-43D0-90F1-2C061F9F50A9}"/>
+                <a16:creationId xmlns:a16="http://schemas.microsoft.com/office/drawing/2014/main" id="{E6D13108-68B6-41BC-9982-CCB827B2D732}"/>
               </a:ext>
             </a:extLst>
           </p:cNvPr>
@@ -2341,7 +2341,7 @@
           <p:cNvPr id="11" name="">
             <a:extLst xmlns:a="http://schemas.openxmlformats.org/drawingml/2006/main">
               <a:ext uri="{FF2B5EF4-FFF2-40B4-BE49-F238E27FC236}">
-                <a16:creationId xmlns:a16="http://schemas.microsoft.com/office/drawing/2014/main" id="{77523875-EFC4-47D5-9608-F88930D01D08}"/>
+                <a16:creationId xmlns:a16="http://schemas.microsoft.com/office/drawing/2014/main" id="{B005D3B3-E8A9-4CDD-9317-9D5410AA1BDE}"/>
               </a:ext>
             </a:extLst>
           </p:cNvPr>
@@ -2396,7 +2396,7 @@
     </p:spTree>
     <p:extLst>
       <p:ext uri="{BB962C8B-B14F-4D97-AF65-F5344CB8AC3E}">
-        <p14:creationId xmlns:p14="http://schemas.microsoft.com/office/powerpoint/2010/main" val="27359595"/>
+        <p14:creationId xmlns:p14="http://schemas.microsoft.com/office/powerpoint/2010/main" val="264127022"/>
       </p:ext>
     </p:extLst>
   </p:cSld>
@@ -2427,7 +2427,7 @@
           <p:cNvPr id="14" name="">
             <a:extLst xmlns:a="http://schemas.openxmlformats.org/drawingml/2006/main">
               <a:ext uri="{FF2B5EF4-FFF2-40B4-BE49-F238E27FC236}">
-                <a16:creationId xmlns:a16="http://schemas.microsoft.com/office/drawing/2014/main" id="{0BCED557-B3DA-46F2-B540-3450C8323BE5}"/>
+                <a16:creationId xmlns:a16="http://schemas.microsoft.com/office/drawing/2014/main" id="{73ECCEA7-5E47-4406-BE80-C105062B517E}"/>
               </a:ext>
             </a:extLst>
           </p:cNvPr>
@@ -2459,7 +2459,7 @@
           <p:cNvPr id="2" name="">
             <a:extLst xmlns:a="http://schemas.openxmlformats.org/drawingml/2006/main">
               <a:ext uri="{FF2B5EF4-FFF2-40B4-BE49-F238E27FC236}">
-                <a16:creationId xmlns:a16="http://schemas.microsoft.com/office/drawing/2014/main" id="{3141622E-F61B-4D2F-9411-CCDEDBA79493}"/>
+                <a16:creationId xmlns:a16="http://schemas.microsoft.com/office/drawing/2014/main" id="{D8443D0E-DD08-4E9A-8A20-9FBA899F2C2B}"/>
               </a:ext>
             </a:extLst>
           </p:cNvPr>
@@ -2516,7 +2516,7 @@
           <p:cNvPr id="3" name="">
             <a:extLst xmlns:a="http://schemas.openxmlformats.org/drawingml/2006/main">
               <a:ext uri="{FF2B5EF4-FFF2-40B4-BE49-F238E27FC236}">
-                <a16:creationId xmlns:a16="http://schemas.microsoft.com/office/drawing/2014/main" id="{20C01031-551B-4546-9159-C50EF23E688C}"/>
+                <a16:creationId xmlns:a16="http://schemas.microsoft.com/office/drawing/2014/main" id="{2448BFE1-452C-4808-A62D-B51E19EB92B5}"/>
               </a:ext>
             </a:extLst>
           </p:cNvPr>
@@ -2548,7 +2548,7 @@
           <p:cNvPr id="4" name="">
             <a:extLst xmlns:a="http://schemas.openxmlformats.org/drawingml/2006/main">
               <a:ext uri="{FF2B5EF4-FFF2-40B4-BE49-F238E27FC236}">
-                <a16:creationId xmlns:a16="http://schemas.microsoft.com/office/drawing/2014/main" id="{26225233-C1A8-4A0C-91F8-588DA50EDC1F}"/>
+                <a16:creationId xmlns:a16="http://schemas.microsoft.com/office/drawing/2014/main" id="{2E79C91C-893C-46D3-92DA-926A8260D3CF}"/>
               </a:ext>
             </a:extLst>
           </p:cNvPr>
@@ -2605,7 +2605,7 @@
           <p:cNvPr id="5" name="">
             <a:extLst xmlns:a="http://schemas.openxmlformats.org/drawingml/2006/main">
               <a:ext uri="{FF2B5EF4-FFF2-40B4-BE49-F238E27FC236}">
-                <a16:creationId xmlns:a16="http://schemas.microsoft.com/office/drawing/2014/main" id="{3D8640BB-C3AC-4D31-9B2C-2719B3E22066}"/>
+                <a16:creationId xmlns:a16="http://schemas.microsoft.com/office/drawing/2014/main" id="{FB54129B-6E7E-416C-8597-979B4C6E4025}"/>
               </a:ext>
             </a:extLst>
           </p:cNvPr>
@@ -2662,7 +2662,7 @@
           <p:cNvPr id="6" name="">
             <a:extLst xmlns:a="http://schemas.openxmlformats.org/drawingml/2006/main">
               <a:ext uri="{FF2B5EF4-FFF2-40B4-BE49-F238E27FC236}">
-                <a16:creationId xmlns:a16="http://schemas.microsoft.com/office/drawing/2014/main" id="{BE8654AF-FE7E-407A-B327-82540CD88588}"/>
+                <a16:creationId xmlns:a16="http://schemas.microsoft.com/office/drawing/2014/main" id="{BA7C59C3-462D-4AF2-B799-F100AD74704D}"/>
               </a:ext>
             </a:extLst>
           </p:cNvPr>
@@ -2719,7 +2719,7 @@
           <p:cNvPr id="7" name="">
             <a:extLst xmlns:a="http://schemas.openxmlformats.org/drawingml/2006/main">
               <a:ext uri="{FF2B5EF4-FFF2-40B4-BE49-F238E27FC236}">
-                <a16:creationId xmlns:a16="http://schemas.microsoft.com/office/drawing/2014/main" id="{DB632B9C-B50A-42FC-AADA-4B04E8E51385}"/>
+                <a16:creationId xmlns:a16="http://schemas.microsoft.com/office/drawing/2014/main" id="{48A6157C-DBAA-4E84-81D5-54DDB1C8BBA1}"/>
               </a:ext>
             </a:extLst>
           </p:cNvPr>
@@ -2751,7 +2751,7 @@
           <p:cNvPr id="8" name="">
             <a:extLst xmlns:a="http://schemas.openxmlformats.org/drawingml/2006/main">
               <a:ext uri="{FF2B5EF4-FFF2-40B4-BE49-F238E27FC236}">
-                <a16:creationId xmlns:a16="http://schemas.microsoft.com/office/drawing/2014/main" id="{A44FB0B1-282D-44AB-ADBE-389F2546EA60}"/>
+                <a16:creationId xmlns:a16="http://schemas.microsoft.com/office/drawing/2014/main" id="{369B27C5-CC9C-4731-86A3-2E613690BD78}"/>
               </a:ext>
             </a:extLst>
           </p:cNvPr>
@@ -2808,7 +2808,7 @@
           <p:cNvPr id="9" name="">
             <a:extLst xmlns:a="http://schemas.openxmlformats.org/drawingml/2006/main">
               <a:ext uri="{FF2B5EF4-FFF2-40B4-BE49-F238E27FC236}">
-                <a16:creationId xmlns:a16="http://schemas.microsoft.com/office/drawing/2014/main" id="{32D91BDD-4616-46BA-9364-94FC6B3D9518}"/>
+                <a16:creationId xmlns:a16="http://schemas.microsoft.com/office/drawing/2014/main" id="{62482137-7A4B-4F47-8FCC-E6DEA889BC41}"/>
               </a:ext>
             </a:extLst>
           </p:cNvPr>
@@ -2865,7 +2865,7 @@
           <p:cNvPr id="10" name="">
             <a:extLst xmlns:a="http://schemas.openxmlformats.org/drawingml/2006/main">
               <a:ext uri="{FF2B5EF4-FFF2-40B4-BE49-F238E27FC236}">
-                <a16:creationId xmlns:a16="http://schemas.microsoft.com/office/drawing/2014/main" id="{EAEDF7C0-A9E0-4A61-A2EC-7152DF7854CD}"/>
+                <a16:creationId xmlns:a16="http://schemas.microsoft.com/office/drawing/2014/main" id="{11493BE8-DA72-41FA-B63E-CAB686196A09}"/>
               </a:ext>
             </a:extLst>
           </p:cNvPr>
@@ -2922,7 +2922,7 @@
           <p:cNvPr id="11" name="">
             <a:extLst xmlns:a="http://schemas.openxmlformats.org/drawingml/2006/main">
               <a:ext uri="{FF2B5EF4-FFF2-40B4-BE49-F238E27FC236}">
-                <a16:creationId xmlns:a16="http://schemas.microsoft.com/office/drawing/2014/main" id="{99838B78-4AFF-4BC2-A14C-A9A5AEC44B01}"/>
+                <a16:creationId xmlns:a16="http://schemas.microsoft.com/office/drawing/2014/main" id="{961BEAA3-D2EE-42C6-B010-30A97D9E4D54}"/>
               </a:ext>
             </a:extLst>
           </p:cNvPr>
@@ -2979,7 +2979,7 @@
           <p:cNvPr id="12" name="">
             <a:extLst xmlns:a="http://schemas.openxmlformats.org/drawingml/2006/main">
               <a:ext uri="{FF2B5EF4-FFF2-40B4-BE49-F238E27FC236}">
-                <a16:creationId xmlns:a16="http://schemas.microsoft.com/office/drawing/2014/main" id="{35608BD3-73F0-4716-AAED-ED7CBBDA1F2A}"/>
+                <a16:creationId xmlns:a16="http://schemas.microsoft.com/office/drawing/2014/main" id="{41015D32-DB44-4AF8-8D77-8F6196746C0A}"/>
               </a:ext>
             </a:extLst>
           </p:cNvPr>
@@ -3036,7 +3036,7 @@
           <p:cNvPr id="13" name="">
             <a:extLst xmlns:a="http://schemas.openxmlformats.org/drawingml/2006/main">
               <a:ext uri="{FF2B5EF4-FFF2-40B4-BE49-F238E27FC236}">
-                <a16:creationId xmlns:a16="http://schemas.microsoft.com/office/drawing/2014/main" id="{16CA419B-961F-4F8A-9266-9AEA1450DBD4}"/>
+                <a16:creationId xmlns:a16="http://schemas.microsoft.com/office/drawing/2014/main" id="{FC770CE1-A09E-412D-BF09-4973C7EE1516}"/>
               </a:ext>
             </a:extLst>
           </p:cNvPr>
@@ -3091,7 +3091,7 @@
     </p:spTree>
     <p:extLst>
       <p:ext uri="{BB962C8B-B14F-4D97-AF65-F5344CB8AC3E}">
-        <p14:creationId xmlns:p14="http://schemas.microsoft.com/office/powerpoint/2010/main" val="909011525"/>
+        <p14:creationId xmlns:p14="http://schemas.microsoft.com/office/powerpoint/2010/main" val="1139841172"/>
       </p:ext>
     </p:extLst>
   </p:cSld>
@@ -3292,7 +3292,7 @@
           <p:cNvPr id="19" name="">
             <a:extLst xmlns:a="http://schemas.openxmlformats.org/drawingml/2006/main">
               <a:ext uri="{FF2B5EF4-FFF2-40B4-BE49-F238E27FC236}">
-                <a16:creationId xmlns:a16="http://schemas.microsoft.com/office/drawing/2014/main" id="{AFBEEFC1-51F9-4B7A-AD38-1A2C96628515}"/>
+                <a16:creationId xmlns:a16="http://schemas.microsoft.com/office/drawing/2014/main" id="{EF12C856-3D26-4145-A1DE-8F279CD2F128}"/>
               </a:ext>
             </a:extLst>
           </p:cNvPr>
@@ -3324,7 +3324,7 @@
           <p:cNvPr id="2" name="">
             <a:extLst xmlns:a="http://schemas.openxmlformats.org/drawingml/2006/main">
               <a:ext uri="{FF2B5EF4-FFF2-40B4-BE49-F238E27FC236}">
-                <a16:creationId xmlns:a16="http://schemas.microsoft.com/office/drawing/2014/main" id="{CA193933-C10E-4BC8-8E01-D06C5DCCD03D}"/>
+                <a16:creationId xmlns:a16="http://schemas.microsoft.com/office/drawing/2014/main" id="{5B823BD2-2E34-4C5F-95BA-20CE1D153392}"/>
               </a:ext>
             </a:extLst>
           </p:cNvPr>
@@ -3381,7 +3381,7 @@
           <p:cNvPr id="3" name="">
             <a:extLst xmlns:a="http://schemas.openxmlformats.org/drawingml/2006/main">
               <a:ext uri="{FF2B5EF4-FFF2-40B4-BE49-F238E27FC236}">
-                <a16:creationId xmlns:a16="http://schemas.microsoft.com/office/drawing/2014/main" id="{3EF91B64-7FC2-43E0-9CCD-F8E00119A69B}"/>
+                <a16:creationId xmlns:a16="http://schemas.microsoft.com/office/drawing/2014/main" id="{88612A31-104C-447F-9EF6-BEB064407F74}"/>
               </a:ext>
             </a:extLst>
           </p:cNvPr>
@@ -3413,7 +3413,7 @@
           <p:cNvPr id="4" name="">
             <a:extLst xmlns:a="http://schemas.openxmlformats.org/drawingml/2006/main">
               <a:ext uri="{FF2B5EF4-FFF2-40B4-BE49-F238E27FC236}">
-                <a16:creationId xmlns:a16="http://schemas.microsoft.com/office/drawing/2014/main" id="{F593BA8A-8EB0-4EFE-8BB8-96B3F0961BAD}"/>
+                <a16:creationId xmlns:a16="http://schemas.microsoft.com/office/drawing/2014/main" id="{375364E9-4C8E-4DE0-A105-E27EA91C0E39}"/>
               </a:ext>
             </a:extLst>
           </p:cNvPr>
@@ -3470,7 +3470,7 @@
           <p:cNvPr id="5" name="">
             <a:extLst xmlns:a="http://schemas.openxmlformats.org/drawingml/2006/main">
               <a:ext uri="{FF2B5EF4-FFF2-40B4-BE49-F238E27FC236}">
-                <a16:creationId xmlns:a16="http://schemas.microsoft.com/office/drawing/2014/main" id="{847C27F1-4F3A-4E15-A47D-350166561C92}"/>
+                <a16:creationId xmlns:a16="http://schemas.microsoft.com/office/drawing/2014/main" id="{8B1D0370-E0EB-4DAE-A3E2-569E65157F17}"/>
               </a:ext>
             </a:extLst>
           </p:cNvPr>
@@ -3527,7 +3527,7 @@
           <p:cNvPr id="6" name="">
             <a:extLst xmlns:a="http://schemas.openxmlformats.org/drawingml/2006/main">
               <a:ext uri="{FF2B5EF4-FFF2-40B4-BE49-F238E27FC236}">
-                <a16:creationId xmlns:a16="http://schemas.microsoft.com/office/drawing/2014/main" id="{C6305487-AF16-4DA8-9DEB-C162AC79BA1F}"/>
+                <a16:creationId xmlns:a16="http://schemas.microsoft.com/office/drawing/2014/main" id="{F0B90152-5EF7-44A1-89C0-D552708B092B}"/>
               </a:ext>
             </a:extLst>
           </p:cNvPr>
@@ -3584,7 +3584,7 @@
           <p:cNvPr id="7" name="">
             <a:extLst xmlns:a="http://schemas.openxmlformats.org/drawingml/2006/main">
               <a:ext uri="{FF2B5EF4-FFF2-40B4-BE49-F238E27FC236}">
-                <a16:creationId xmlns:a16="http://schemas.microsoft.com/office/drawing/2014/main" id="{8D529823-538A-4A04-A19A-67D2AEBC2615}"/>
+                <a16:creationId xmlns:a16="http://schemas.microsoft.com/office/drawing/2014/main" id="{0B0B6A1F-EFF8-4F0A-BEBA-580F7F1D7A93}"/>
               </a:ext>
             </a:extLst>
           </p:cNvPr>
@@ -3616,7 +3616,7 @@
           <p:cNvPr id="8" name="">
             <a:extLst xmlns:a="http://schemas.openxmlformats.org/drawingml/2006/main">
               <a:ext uri="{FF2B5EF4-FFF2-40B4-BE49-F238E27FC236}">
-                <a16:creationId xmlns:a16="http://schemas.microsoft.com/office/drawing/2014/main" id="{C3FA88EE-334F-4E0D-91A1-710B88828B31}"/>
+                <a16:creationId xmlns:a16="http://schemas.microsoft.com/office/drawing/2014/main" id="{9EFBF36E-8524-4691-B762-BFF9ADAA6F15}"/>
               </a:ext>
             </a:extLst>
           </p:cNvPr>
@@ -3673,7 +3673,7 @@
           <p:cNvPr id="9" name="">
             <a:extLst xmlns:a="http://schemas.openxmlformats.org/drawingml/2006/main">
               <a:ext uri="{FF2B5EF4-FFF2-40B4-BE49-F238E27FC236}">
-                <a16:creationId xmlns:a16="http://schemas.microsoft.com/office/drawing/2014/main" id="{8D8680A2-5B27-4F48-90C7-C757AADEF48A}"/>
+                <a16:creationId xmlns:a16="http://schemas.microsoft.com/office/drawing/2014/main" id="{1FB073A9-EAAD-43C5-B5FC-DD02346A0059}"/>
               </a:ext>
             </a:extLst>
           </p:cNvPr>
@@ -3730,7 +3730,7 @@
           <p:cNvPr id="10" name="">
             <a:extLst xmlns:a="http://schemas.openxmlformats.org/drawingml/2006/main">
               <a:ext uri="{FF2B5EF4-FFF2-40B4-BE49-F238E27FC236}">
-                <a16:creationId xmlns:a16="http://schemas.microsoft.com/office/drawing/2014/main" id="{CB365987-F6A3-4571-95A1-237B16BC2B8C}"/>
+                <a16:creationId xmlns:a16="http://schemas.microsoft.com/office/drawing/2014/main" id="{6CF9A748-685B-4541-98C6-D75E82EF247A}"/>
               </a:ext>
             </a:extLst>
           </p:cNvPr>
@@ -3787,7 +3787,7 @@
           <p:cNvPr id="11" name="">
             <a:extLst xmlns:a="http://schemas.openxmlformats.org/drawingml/2006/main">
               <a:ext uri="{FF2B5EF4-FFF2-40B4-BE49-F238E27FC236}">
-                <a16:creationId xmlns:a16="http://schemas.microsoft.com/office/drawing/2014/main" id="{AFDB729E-74B7-4464-9F90-3AFA34A5DC07}"/>
+                <a16:creationId xmlns:a16="http://schemas.microsoft.com/office/drawing/2014/main" id="{5F016C5D-8B59-4BF3-B9AC-7F8E1F8D3BE7}"/>
               </a:ext>
             </a:extLst>
           </p:cNvPr>
@@ -3821,7 +3821,7 @@
           <p:cNvPr id="12" name="">
             <a:extLst xmlns:a="http://schemas.openxmlformats.org/drawingml/2006/main">
               <a:ext uri="{FF2B5EF4-FFF2-40B4-BE49-F238E27FC236}">
-                <a16:creationId xmlns:a16="http://schemas.microsoft.com/office/drawing/2014/main" id="{D96A789F-1DBD-466B-B40D-C8EF14D049EB}"/>
+                <a16:creationId xmlns:a16="http://schemas.microsoft.com/office/drawing/2014/main" id="{23776E87-1CF5-4948-B710-68B48A68A333}"/>
               </a:ext>
             </a:extLst>
           </p:cNvPr>
@@ -3878,7 +3878,7 @@
           <p:cNvPr id="13" name="">
             <a:extLst xmlns:a="http://schemas.openxmlformats.org/drawingml/2006/main">
               <a:ext uri="{FF2B5EF4-FFF2-40B4-BE49-F238E27FC236}">
-                <a16:creationId xmlns:a16="http://schemas.microsoft.com/office/drawing/2014/main" id="{34415C01-56F3-4D59-A0D5-475DDF8B36C8}"/>
+                <a16:creationId xmlns:a16="http://schemas.microsoft.com/office/drawing/2014/main" id="{7040DCF3-D473-40DA-A33F-4C32C86AFA6C}"/>
               </a:ext>
             </a:extLst>
           </p:cNvPr>
@@ -3935,7 +3935,7 @@
           <p:cNvPr id="14" name="">
             <a:extLst xmlns:a="http://schemas.openxmlformats.org/drawingml/2006/main">
               <a:ext uri="{FF2B5EF4-FFF2-40B4-BE49-F238E27FC236}">
-                <a16:creationId xmlns:a16="http://schemas.microsoft.com/office/drawing/2014/main" id="{6D9B7D3A-23E7-4AC2-9537-91D512321013}"/>
+                <a16:creationId xmlns:a16="http://schemas.microsoft.com/office/drawing/2014/main" id="{9FB7F3D9-58D9-4443-A450-ABF69833F051}"/>
               </a:ext>
             </a:extLst>
           </p:cNvPr>
@@ -3992,7 +3992,7 @@
           <p:cNvPr id="15" name="">
             <a:extLst xmlns:a="http://schemas.openxmlformats.org/drawingml/2006/main">
               <a:ext uri="{FF2B5EF4-FFF2-40B4-BE49-F238E27FC236}">
-                <a16:creationId xmlns:a16="http://schemas.microsoft.com/office/drawing/2014/main" id="{03DA1F2A-FB27-4724-A2CD-C8872CEB29CD}"/>
+                <a16:creationId xmlns:a16="http://schemas.microsoft.com/office/drawing/2014/main" id="{61954B55-1255-4C2B-BE25-94FE1BA5A279}"/>
               </a:ext>
             </a:extLst>
           </p:cNvPr>
@@ -4026,7 +4026,7 @@
           <p:cNvPr id="16" name="">
             <a:extLst xmlns:a="http://schemas.openxmlformats.org/drawingml/2006/main">
               <a:ext uri="{FF2B5EF4-FFF2-40B4-BE49-F238E27FC236}">
-                <a16:creationId xmlns:a16="http://schemas.microsoft.com/office/drawing/2014/main" id="{BA90DB03-9622-4FD9-B4FA-2C94C3251C7F}"/>
+                <a16:creationId xmlns:a16="http://schemas.microsoft.com/office/drawing/2014/main" id="{4EAF0FD1-7FB1-419F-8334-101DB6EC60F8}"/>
               </a:ext>
             </a:extLst>
           </p:cNvPr>
@@ -4083,7 +4083,7 @@
           <p:cNvPr id="17" name="">
             <a:extLst xmlns:a="http://schemas.openxmlformats.org/drawingml/2006/main">
               <a:ext uri="{FF2B5EF4-FFF2-40B4-BE49-F238E27FC236}">
-                <a16:creationId xmlns:a16="http://schemas.microsoft.com/office/drawing/2014/main" id="{3B726291-587D-4BF2-89DF-713C58237F69}"/>
+                <a16:creationId xmlns:a16="http://schemas.microsoft.com/office/drawing/2014/main" id="{0B7B2151-3B96-4A6F-8529-966620D03E31}"/>
               </a:ext>
             </a:extLst>
           </p:cNvPr>
@@ -4140,7 +4140,7 @@
           <p:cNvPr id="18" name="">
             <a:extLst xmlns:a="http://schemas.openxmlformats.org/drawingml/2006/main">
               <a:ext uri="{FF2B5EF4-FFF2-40B4-BE49-F238E27FC236}">
-                <a16:creationId xmlns:a16="http://schemas.microsoft.com/office/drawing/2014/main" id="{140047CF-B953-48B6-860A-8F50316C4F79}"/>
+                <a16:creationId xmlns:a16="http://schemas.microsoft.com/office/drawing/2014/main" id="{30E6D525-63B1-41CA-B153-424279490374}"/>
               </a:ext>
             </a:extLst>
           </p:cNvPr>
@@ -4195,7 +4195,7 @@
     </p:spTree>
     <p:extLst>
       <p:ext uri="{BB962C8B-B14F-4D97-AF65-F5344CB8AC3E}">
-        <p14:creationId xmlns:p14="http://schemas.microsoft.com/office/powerpoint/2010/main" val="739024741"/>
+        <p14:creationId xmlns:p14="http://schemas.microsoft.com/office/powerpoint/2010/main" val="1869940844"/>
       </p:ext>
     </p:extLst>
   </p:cSld>
@@ -4350,7 +4350,7 @@
           <p:cNvPr id="23" name="">
             <a:extLst xmlns:a="http://schemas.openxmlformats.org/drawingml/2006/main">
               <a:ext uri="{FF2B5EF4-FFF2-40B4-BE49-F238E27FC236}">
-                <a16:creationId xmlns:a16="http://schemas.microsoft.com/office/drawing/2014/main" id="{89E8784D-EA1C-49F8-9BAF-D1FDE67CAE65}"/>
+                <a16:creationId xmlns:a16="http://schemas.microsoft.com/office/drawing/2014/main" id="{9D3EDCDD-B6E8-4441-9117-38C27EADCE98}"/>
               </a:ext>
             </a:extLst>
           </p:cNvPr>
@@ -4382,7 +4382,7 @@
           <p:cNvPr id="2" name="">
             <a:extLst xmlns:a="http://schemas.openxmlformats.org/drawingml/2006/main">
               <a:ext uri="{FF2B5EF4-FFF2-40B4-BE49-F238E27FC236}">
-                <a16:creationId xmlns:a16="http://schemas.microsoft.com/office/drawing/2014/main" id="{D697D185-7A78-44CE-8682-B305D58D71F1}"/>
+                <a16:creationId xmlns:a16="http://schemas.microsoft.com/office/drawing/2014/main" id="{E7FB9E82-D7C5-406F-B1BE-2B597EECA4D0}"/>
               </a:ext>
             </a:extLst>
           </p:cNvPr>
@@ -4439,7 +4439,7 @@
           <p:cNvPr id="3" name="">
             <a:extLst xmlns:a="http://schemas.openxmlformats.org/drawingml/2006/main">
               <a:ext uri="{FF2B5EF4-FFF2-40B4-BE49-F238E27FC236}">
-                <a16:creationId xmlns:a16="http://schemas.microsoft.com/office/drawing/2014/main" id="{85A1BBFE-7A24-4951-89E5-9CD9D8808ACA}"/>
+                <a16:creationId xmlns:a16="http://schemas.microsoft.com/office/drawing/2014/main" id="{4F234560-16F8-43F1-AF44-D0930CC080E5}"/>
               </a:ext>
             </a:extLst>
           </p:cNvPr>
@@ -4471,7 +4471,7 @@
           <p:cNvPr id="4" name="">
             <a:extLst xmlns:a="http://schemas.openxmlformats.org/drawingml/2006/main">
               <a:ext uri="{FF2B5EF4-FFF2-40B4-BE49-F238E27FC236}">
-                <a16:creationId xmlns:a16="http://schemas.microsoft.com/office/drawing/2014/main" id="{5E2577FF-4BB1-4950-AE6A-33A44D315F6D}"/>
+                <a16:creationId xmlns:a16="http://schemas.microsoft.com/office/drawing/2014/main" id="{5162F062-E364-4F37-A007-C894FC4A0365}"/>
               </a:ext>
             </a:extLst>
           </p:cNvPr>
@@ -4528,7 +4528,7 @@
           <p:cNvPr id="5" name="">
             <a:extLst xmlns:a="http://schemas.openxmlformats.org/drawingml/2006/main">
               <a:ext uri="{FF2B5EF4-FFF2-40B4-BE49-F238E27FC236}">
-                <a16:creationId xmlns:a16="http://schemas.microsoft.com/office/drawing/2014/main" id="{EA24F88B-879C-4818-8DAC-D5422DACF5E4}"/>
+                <a16:creationId xmlns:a16="http://schemas.microsoft.com/office/drawing/2014/main" id="{5172CBC6-6410-47D9-8BEE-A13F41383360}"/>
               </a:ext>
             </a:extLst>
           </p:cNvPr>
@@ -4585,7 +4585,7 @@
           <p:cNvPr id="6" name="">
             <a:extLst xmlns:a="http://schemas.openxmlformats.org/drawingml/2006/main">
               <a:ext uri="{FF2B5EF4-FFF2-40B4-BE49-F238E27FC236}">
-                <a16:creationId xmlns:a16="http://schemas.microsoft.com/office/drawing/2014/main" id="{75189A47-AE3C-4F81-90FC-E2CF381BC917}"/>
+                <a16:creationId xmlns:a16="http://schemas.microsoft.com/office/drawing/2014/main" id="{F7177FFB-E41E-4937-BECD-8C528B6E4943}"/>
               </a:ext>
             </a:extLst>
           </p:cNvPr>
@@ -4642,7 +4642,7 @@
           <p:cNvPr id="7" name="">
             <a:extLst xmlns:a="http://schemas.openxmlformats.org/drawingml/2006/main">
               <a:ext uri="{FF2B5EF4-FFF2-40B4-BE49-F238E27FC236}">
-                <a16:creationId xmlns:a16="http://schemas.microsoft.com/office/drawing/2014/main" id="{3F5CF0AE-A96E-449F-90FD-A8E93D4980A2}"/>
+                <a16:creationId xmlns:a16="http://schemas.microsoft.com/office/drawing/2014/main" id="{67C138CF-09D6-446E-90A3-E93766637A20}"/>
               </a:ext>
             </a:extLst>
           </p:cNvPr>
@@ -4674,7 +4674,7 @@
           <p:cNvPr id="8" name="">
             <a:extLst xmlns:a="http://schemas.openxmlformats.org/drawingml/2006/main">
               <a:ext uri="{FF2B5EF4-FFF2-40B4-BE49-F238E27FC236}">
-                <a16:creationId xmlns:a16="http://schemas.microsoft.com/office/drawing/2014/main" id="{F87C5927-7A7F-489C-9DF0-701A9BDD0925}"/>
+                <a16:creationId xmlns:a16="http://schemas.microsoft.com/office/drawing/2014/main" id="{D5D7F5F5-A340-42E5-BDA0-E0BE267C4499}"/>
               </a:ext>
             </a:extLst>
           </p:cNvPr>
@@ -4731,7 +4731,7 @@
           <p:cNvPr id="9" name="">
             <a:extLst xmlns:a="http://schemas.openxmlformats.org/drawingml/2006/main">
               <a:ext uri="{FF2B5EF4-FFF2-40B4-BE49-F238E27FC236}">
-                <a16:creationId xmlns:a16="http://schemas.microsoft.com/office/drawing/2014/main" id="{65DE4CAE-75DB-4E13-A25D-DFD7FE01C726}"/>
+                <a16:creationId xmlns:a16="http://schemas.microsoft.com/office/drawing/2014/main" id="{7B4BE144-B9BD-4270-B7B1-0712BE8E576C}"/>
               </a:ext>
             </a:extLst>
           </p:cNvPr>
@@ -4788,7 +4788,7 @@
           <p:cNvPr id="10" name="">
             <a:extLst xmlns:a="http://schemas.openxmlformats.org/drawingml/2006/main">
               <a:ext uri="{FF2B5EF4-FFF2-40B4-BE49-F238E27FC236}">
-                <a16:creationId xmlns:a16="http://schemas.microsoft.com/office/drawing/2014/main" id="{C12E7995-D720-4D5A-9B03-C3F38109BF87}"/>
+                <a16:creationId xmlns:a16="http://schemas.microsoft.com/office/drawing/2014/main" id="{789A2F66-A958-4613-B83B-CE38FB460553}"/>
               </a:ext>
             </a:extLst>
           </p:cNvPr>
@@ -4822,7 +4822,7 @@
           <p:cNvPr id="11" name="">
             <a:extLst xmlns:a="http://schemas.openxmlformats.org/drawingml/2006/main">
               <a:ext uri="{FF2B5EF4-FFF2-40B4-BE49-F238E27FC236}">
-                <a16:creationId xmlns:a16="http://schemas.microsoft.com/office/drawing/2014/main" id="{C8A92299-CE61-4B0E-A582-76488D4AD1FE}"/>
+                <a16:creationId xmlns:a16="http://schemas.microsoft.com/office/drawing/2014/main" id="{219EC02B-1B7F-4A8E-A339-0C5F80125ED1}"/>
               </a:ext>
             </a:extLst>
           </p:cNvPr>
@@ -4854,7 +4854,7 @@
           <p:cNvPr id="12" name="">
             <a:extLst xmlns:a="http://schemas.openxmlformats.org/drawingml/2006/main">
               <a:ext uri="{FF2B5EF4-FFF2-40B4-BE49-F238E27FC236}">
-                <a16:creationId xmlns:a16="http://schemas.microsoft.com/office/drawing/2014/main" id="{270B59F5-2A98-436E-97C5-05E3209E336F}"/>
+                <a16:creationId xmlns:a16="http://schemas.microsoft.com/office/drawing/2014/main" id="{54AA2FA9-09E8-4C1E-B82E-AAF3D1580144}"/>
               </a:ext>
             </a:extLst>
           </p:cNvPr>
@@ -4911,7 +4911,7 @@
           <p:cNvPr id="13" name="">
             <a:extLst xmlns:a="http://schemas.openxmlformats.org/drawingml/2006/main">
               <a:ext uri="{FF2B5EF4-FFF2-40B4-BE49-F238E27FC236}">
-                <a16:creationId xmlns:a16="http://schemas.microsoft.com/office/drawing/2014/main" id="{086641A7-A4A4-4299-A497-9A85D6A0D6C4}"/>
+                <a16:creationId xmlns:a16="http://schemas.microsoft.com/office/drawing/2014/main" id="{0ED6A86A-517C-41DB-9D68-4A4B060EF9F4}"/>
               </a:ext>
             </a:extLst>
           </p:cNvPr>
@@ -4968,7 +4968,7 @@
           <p:cNvPr id="14" name="">
             <a:extLst xmlns:a="http://schemas.openxmlformats.org/drawingml/2006/main">
               <a:ext uri="{FF2B5EF4-FFF2-40B4-BE49-F238E27FC236}">
-                <a16:creationId xmlns:a16="http://schemas.microsoft.com/office/drawing/2014/main" id="{B22B215A-305E-46A5-A948-6A4CA74C51E8}"/>
+                <a16:creationId xmlns:a16="http://schemas.microsoft.com/office/drawing/2014/main" id="{771134CB-2A89-4A7A-9E8D-4B3E83985CB6}"/>
               </a:ext>
             </a:extLst>
           </p:cNvPr>
@@ -5002,7 +5002,7 @@
           <p:cNvPr id="15" name="">
             <a:extLst xmlns:a="http://schemas.openxmlformats.org/drawingml/2006/main">
               <a:ext uri="{FF2B5EF4-FFF2-40B4-BE49-F238E27FC236}">
-                <a16:creationId xmlns:a16="http://schemas.microsoft.com/office/drawing/2014/main" id="{F38D941F-F144-40A3-91D3-1FFE0A88FB7C}"/>
+                <a16:creationId xmlns:a16="http://schemas.microsoft.com/office/drawing/2014/main" id="{CA8F8419-E2EE-4951-8866-59C6A3D1622E}"/>
               </a:ext>
             </a:extLst>
           </p:cNvPr>
@@ -5034,7 +5034,7 @@
           <p:cNvPr id="16" name="">
             <a:extLst xmlns:a="http://schemas.openxmlformats.org/drawingml/2006/main">
               <a:ext uri="{FF2B5EF4-FFF2-40B4-BE49-F238E27FC236}">
-                <a16:creationId xmlns:a16="http://schemas.microsoft.com/office/drawing/2014/main" id="{48C39712-5C11-46CB-BA23-944A9F798B98}"/>
+                <a16:creationId xmlns:a16="http://schemas.microsoft.com/office/drawing/2014/main" id="{D3A341C4-2D85-4EE3-96D6-C696F4B4A93D}"/>
               </a:ext>
             </a:extLst>
           </p:cNvPr>
@@ -5091,7 +5091,7 @@
           <p:cNvPr id="17" name="">
             <a:extLst xmlns:a="http://schemas.openxmlformats.org/drawingml/2006/main">
               <a:ext uri="{FF2B5EF4-FFF2-40B4-BE49-F238E27FC236}">
-                <a16:creationId xmlns:a16="http://schemas.microsoft.com/office/drawing/2014/main" id="{D63036FE-478B-4C79-A017-9BEABEEA84D5}"/>
+                <a16:creationId xmlns:a16="http://schemas.microsoft.com/office/drawing/2014/main" id="{713FF983-F2DE-43DC-BD55-B3DD610F28B4}"/>
               </a:ext>
             </a:extLst>
           </p:cNvPr>
@@ -5148,7 +5148,7 @@
           <p:cNvPr id="18" name="">
             <a:extLst xmlns:a="http://schemas.openxmlformats.org/drawingml/2006/main">
               <a:ext uri="{FF2B5EF4-FFF2-40B4-BE49-F238E27FC236}">
-                <a16:creationId xmlns:a16="http://schemas.microsoft.com/office/drawing/2014/main" id="{BD1EE3ED-37D9-43C6-8C9B-CF35ADD08C42}"/>
+                <a16:creationId xmlns:a16="http://schemas.microsoft.com/office/drawing/2014/main" id="{97A68C76-8602-44F6-AA87-673218D4404C}"/>
               </a:ext>
             </a:extLst>
           </p:cNvPr>
@@ -5182,7 +5182,7 @@
           <p:cNvPr id="19" name="">
             <a:extLst xmlns:a="http://schemas.openxmlformats.org/drawingml/2006/main">
               <a:ext uri="{FF2B5EF4-FFF2-40B4-BE49-F238E27FC236}">
-                <a16:creationId xmlns:a16="http://schemas.microsoft.com/office/drawing/2014/main" id="{524F7F8B-36AC-4E03-8D38-8D0A10E01A40}"/>
+                <a16:creationId xmlns:a16="http://schemas.microsoft.com/office/drawing/2014/main" id="{6BD4E351-8BC3-43B6-91EB-E7FD72A6C688}"/>
               </a:ext>
             </a:extLst>
           </p:cNvPr>
@@ -5214,7 +5214,7 @@
           <p:cNvPr id="20" name="">
             <a:extLst xmlns:a="http://schemas.openxmlformats.org/drawingml/2006/main">
               <a:ext uri="{FF2B5EF4-FFF2-40B4-BE49-F238E27FC236}">
-                <a16:creationId xmlns:a16="http://schemas.microsoft.com/office/drawing/2014/main" id="{5C305575-E349-43B5-8247-2F04B1721CDE}"/>
+                <a16:creationId xmlns:a16="http://schemas.microsoft.com/office/drawing/2014/main" id="{D599FF0F-F10D-425E-8FD1-C9F78CAD5FED}"/>
               </a:ext>
             </a:extLst>
           </p:cNvPr>
@@ -5271,7 +5271,7 @@
           <p:cNvPr id="21" name="">
             <a:extLst xmlns:a="http://schemas.openxmlformats.org/drawingml/2006/main">
               <a:ext uri="{FF2B5EF4-FFF2-40B4-BE49-F238E27FC236}">
-                <a16:creationId xmlns:a16="http://schemas.microsoft.com/office/drawing/2014/main" id="{FE30B52E-48B1-4DFF-B963-785893728F74}"/>
+                <a16:creationId xmlns:a16="http://schemas.microsoft.com/office/drawing/2014/main" id="{3A8990F8-22F8-4534-9ED9-E262F55CBD4D}"/>
               </a:ext>
             </a:extLst>
           </p:cNvPr>
@@ -5328,7 +5328,7 @@
           <p:cNvPr id="22" name="">
             <a:extLst xmlns:a="http://schemas.openxmlformats.org/drawingml/2006/main">
               <a:ext uri="{FF2B5EF4-FFF2-40B4-BE49-F238E27FC236}">
-                <a16:creationId xmlns:a16="http://schemas.microsoft.com/office/drawing/2014/main" id="{6A86641C-A779-4F17-BA3B-50704C17B288}"/>
+                <a16:creationId xmlns:a16="http://schemas.microsoft.com/office/drawing/2014/main" id="{1BA11781-567E-479B-A809-704F52D47D68}"/>
               </a:ext>
             </a:extLst>
           </p:cNvPr>
@@ -5383,7 +5383,7 @@
     </p:spTree>
     <p:extLst>
       <p:ext uri="{BB962C8B-B14F-4D97-AF65-F5344CB8AC3E}">
-        <p14:creationId xmlns:p14="http://schemas.microsoft.com/office/powerpoint/2010/main" val="885545821"/>
+        <p14:creationId xmlns:p14="http://schemas.microsoft.com/office/powerpoint/2010/main" val="1021330720"/>
       </p:ext>
     </p:extLst>
   </p:cSld>
@@ -5584,7 +5584,7 @@
           <p:cNvPr id="23" name="">
             <a:extLst xmlns:a="http://schemas.openxmlformats.org/drawingml/2006/main">
               <a:ext uri="{FF2B5EF4-FFF2-40B4-BE49-F238E27FC236}">
-                <a16:creationId xmlns:a16="http://schemas.microsoft.com/office/drawing/2014/main" id="{1A89A24F-C940-4229-9A2C-EF8D08346615}"/>
+                <a16:creationId xmlns:a16="http://schemas.microsoft.com/office/drawing/2014/main" id="{0BC54C69-2726-4C8C-8ED7-06691D934306}"/>
               </a:ext>
             </a:extLst>
           </p:cNvPr>
@@ -5616,7 +5616,7 @@
           <p:cNvPr id="2" name="">
             <a:extLst xmlns:a="http://schemas.openxmlformats.org/drawingml/2006/main">
               <a:ext uri="{FF2B5EF4-FFF2-40B4-BE49-F238E27FC236}">
-                <a16:creationId xmlns:a16="http://schemas.microsoft.com/office/drawing/2014/main" id="{A004C4D4-867D-4E64-9007-B5E098D662A9}"/>
+                <a16:creationId xmlns:a16="http://schemas.microsoft.com/office/drawing/2014/main" id="{85B32D6C-D5A8-4D26-B4E5-397A7C668FAF}"/>
               </a:ext>
             </a:extLst>
           </p:cNvPr>
@@ -5673,7 +5673,7 @@
           <p:cNvPr id="3" name="">
             <a:extLst xmlns:a="http://schemas.openxmlformats.org/drawingml/2006/main">
               <a:ext uri="{FF2B5EF4-FFF2-40B4-BE49-F238E27FC236}">
-                <a16:creationId xmlns:a16="http://schemas.microsoft.com/office/drawing/2014/main" id="{D5EDCF49-BF70-4A19-98EB-FA70CA24B96F}"/>
+                <a16:creationId xmlns:a16="http://schemas.microsoft.com/office/drawing/2014/main" id="{1CBAF1EA-1733-40B2-BBB7-03681FE8396C}"/>
               </a:ext>
             </a:extLst>
           </p:cNvPr>
@@ -5705,7 +5705,7 @@
           <p:cNvPr id="4" name="">
             <a:extLst xmlns:a="http://schemas.openxmlformats.org/drawingml/2006/main">
               <a:ext uri="{FF2B5EF4-FFF2-40B4-BE49-F238E27FC236}">
-                <a16:creationId xmlns:a16="http://schemas.microsoft.com/office/drawing/2014/main" id="{9E3B5382-8A4F-4939-88AA-3BD795B3E929}"/>
+                <a16:creationId xmlns:a16="http://schemas.microsoft.com/office/drawing/2014/main" id="{D42954B3-456E-4DA4-BD51-553F5A89B5AB}"/>
               </a:ext>
             </a:extLst>
           </p:cNvPr>
@@ -5762,7 +5762,7 @@
           <p:cNvPr id="5" name="">
             <a:extLst xmlns:a="http://schemas.openxmlformats.org/drawingml/2006/main">
               <a:ext uri="{FF2B5EF4-FFF2-40B4-BE49-F238E27FC236}">
-                <a16:creationId xmlns:a16="http://schemas.microsoft.com/office/drawing/2014/main" id="{6A1A8379-1D1A-4A9E-9742-EA491C4F0C80}"/>
+                <a16:creationId xmlns:a16="http://schemas.microsoft.com/office/drawing/2014/main" id="{E5B6A910-EE23-4BB0-B630-FFD14A4394F7}"/>
               </a:ext>
             </a:extLst>
           </p:cNvPr>
@@ -5819,7 +5819,7 @@
           <p:cNvPr id="6" name="">
             <a:extLst xmlns:a="http://schemas.openxmlformats.org/drawingml/2006/main">
               <a:ext uri="{FF2B5EF4-FFF2-40B4-BE49-F238E27FC236}">
-                <a16:creationId xmlns:a16="http://schemas.microsoft.com/office/drawing/2014/main" id="{D86CB84D-F900-4A6C-9A56-18846CB1EB00}"/>
+                <a16:creationId xmlns:a16="http://schemas.microsoft.com/office/drawing/2014/main" id="{00B0D6E9-B06B-481B-8674-F51ADE87E2BB}"/>
               </a:ext>
             </a:extLst>
           </p:cNvPr>
@@ -5876,7 +5876,7 @@
           <p:cNvPr id="7" name="">
             <a:extLst xmlns:a="http://schemas.openxmlformats.org/drawingml/2006/main">
               <a:ext uri="{FF2B5EF4-FFF2-40B4-BE49-F238E27FC236}">
-                <a16:creationId xmlns:a16="http://schemas.microsoft.com/office/drawing/2014/main" id="{13A6ECC4-6F35-4212-9A7E-37FB3126D2C6}"/>
+                <a16:creationId xmlns:a16="http://schemas.microsoft.com/office/drawing/2014/main" id="{175FCAD4-DD59-42F4-86FD-DA135B682E8D}"/>
               </a:ext>
             </a:extLst>
           </p:cNvPr>
@@ -5908,7 +5908,7 @@
           <p:cNvPr id="8" name="">
             <a:extLst xmlns:a="http://schemas.openxmlformats.org/drawingml/2006/main">
               <a:ext uri="{FF2B5EF4-FFF2-40B4-BE49-F238E27FC236}">
-                <a16:creationId xmlns:a16="http://schemas.microsoft.com/office/drawing/2014/main" id="{C098BA89-28F5-42B2-8583-999F2CCA535C}"/>
+                <a16:creationId xmlns:a16="http://schemas.microsoft.com/office/drawing/2014/main" id="{723F8D45-52E8-4BA7-966D-1EAA96D722F4}"/>
               </a:ext>
             </a:extLst>
           </p:cNvPr>
@@ -5965,7 +5965,7 @@
           <p:cNvPr id="9" name="">
             <a:extLst xmlns:a="http://schemas.openxmlformats.org/drawingml/2006/main">
               <a:ext uri="{FF2B5EF4-FFF2-40B4-BE49-F238E27FC236}">
-                <a16:creationId xmlns:a16="http://schemas.microsoft.com/office/drawing/2014/main" id="{1368E290-DE12-42AC-AB1C-3A8FD7A3CD88}"/>
+                <a16:creationId xmlns:a16="http://schemas.microsoft.com/office/drawing/2014/main" id="{45F474D6-B2DE-4F2A-B54C-7D58626F4B8B}"/>
               </a:ext>
             </a:extLst>
           </p:cNvPr>
@@ -6022,7 +6022,7 @@
           <p:cNvPr id="10" name="">
             <a:extLst xmlns:a="http://schemas.openxmlformats.org/drawingml/2006/main">
               <a:ext uri="{FF2B5EF4-FFF2-40B4-BE49-F238E27FC236}">
-                <a16:creationId xmlns:a16="http://schemas.microsoft.com/office/drawing/2014/main" id="{F8355611-DEDF-4055-B8A0-EC1BA22E98A1}"/>
+                <a16:creationId xmlns:a16="http://schemas.microsoft.com/office/drawing/2014/main" id="{D819069B-EACB-47BF-9763-604B4A40E268}"/>
               </a:ext>
             </a:extLst>
           </p:cNvPr>
@@ -6056,7 +6056,7 @@
           <p:cNvPr id="11" name="">
             <a:extLst xmlns:a="http://schemas.openxmlformats.org/drawingml/2006/main">
               <a:ext uri="{FF2B5EF4-FFF2-40B4-BE49-F238E27FC236}">
-                <a16:creationId xmlns:a16="http://schemas.microsoft.com/office/drawing/2014/main" id="{07E45439-15CC-44F2-9EAF-9BE0073984ED}"/>
+                <a16:creationId xmlns:a16="http://schemas.microsoft.com/office/drawing/2014/main" id="{7B02CB59-9946-42D0-B75B-743B2E45D221}"/>
               </a:ext>
             </a:extLst>
           </p:cNvPr>
@@ -6088,7 +6088,7 @@
           <p:cNvPr id="12" name="">
             <a:extLst xmlns:a="http://schemas.openxmlformats.org/drawingml/2006/main">
               <a:ext uri="{FF2B5EF4-FFF2-40B4-BE49-F238E27FC236}">
-                <a16:creationId xmlns:a16="http://schemas.microsoft.com/office/drawing/2014/main" id="{417309C7-9E35-4A29-8574-CBF0ECCDAA6C}"/>
+                <a16:creationId xmlns:a16="http://schemas.microsoft.com/office/drawing/2014/main" id="{98319140-2A08-42BB-8651-9467972BEB5F}"/>
               </a:ext>
             </a:extLst>
           </p:cNvPr>
@@ -6145,7 +6145,7 @@
           <p:cNvPr id="13" name="">
             <a:extLst xmlns:a="http://schemas.openxmlformats.org/drawingml/2006/main">
               <a:ext uri="{FF2B5EF4-FFF2-40B4-BE49-F238E27FC236}">
-                <a16:creationId xmlns:a16="http://schemas.microsoft.com/office/drawing/2014/main" id="{61D949BE-9915-4364-8284-533DDCE0513E}"/>
+                <a16:creationId xmlns:a16="http://schemas.microsoft.com/office/drawing/2014/main" id="{D6DC5F1C-4F2E-495D-8A09-26DB9B10F95E}"/>
               </a:ext>
             </a:extLst>
           </p:cNvPr>
@@ -6202,7 +6202,7 @@
           <p:cNvPr id="14" name="">
             <a:extLst xmlns:a="http://schemas.openxmlformats.org/drawingml/2006/main">
               <a:ext uri="{FF2B5EF4-FFF2-40B4-BE49-F238E27FC236}">
-                <a16:creationId xmlns:a16="http://schemas.microsoft.com/office/drawing/2014/main" id="{AD02DD43-BF76-44C4-8861-3A1D82E470EA}"/>
+                <a16:creationId xmlns:a16="http://schemas.microsoft.com/office/drawing/2014/main" id="{45D79396-EA71-457A-82C1-3D3537F090BB}"/>
               </a:ext>
             </a:extLst>
           </p:cNvPr>
@@ -6236,7 +6236,7 @@
           <p:cNvPr id="15" name="">
             <a:extLst xmlns:a="http://schemas.openxmlformats.org/drawingml/2006/main">
               <a:ext uri="{FF2B5EF4-FFF2-40B4-BE49-F238E27FC236}">
-                <a16:creationId xmlns:a16="http://schemas.microsoft.com/office/drawing/2014/main" id="{2960A1F8-E0D7-47A2-8ADF-82EEA8DFDCBA}"/>
+                <a16:creationId xmlns:a16="http://schemas.microsoft.com/office/drawing/2014/main" id="{171EB590-FA43-4F22-95FE-9BD8FD40B42C}"/>
               </a:ext>
             </a:extLst>
           </p:cNvPr>
@@ -6268,7 +6268,7 @@
           <p:cNvPr id="16" name="">
             <a:extLst xmlns:a="http://schemas.openxmlformats.org/drawingml/2006/main">
               <a:ext uri="{FF2B5EF4-FFF2-40B4-BE49-F238E27FC236}">
-                <a16:creationId xmlns:a16="http://schemas.microsoft.com/office/drawing/2014/main" id="{286A51A1-D984-42B7-B74A-6BA52A1721E4}"/>
+                <a16:creationId xmlns:a16="http://schemas.microsoft.com/office/drawing/2014/main" id="{026DBB98-4586-4F0F-8C8A-D6634EB038D8}"/>
               </a:ext>
             </a:extLst>
           </p:cNvPr>
@@ -6325,7 +6325,7 @@
           <p:cNvPr id="17" name="">
             <a:extLst xmlns:a="http://schemas.openxmlformats.org/drawingml/2006/main">
               <a:ext uri="{FF2B5EF4-FFF2-40B4-BE49-F238E27FC236}">
-                <a16:creationId xmlns:a16="http://schemas.microsoft.com/office/drawing/2014/main" id="{60C8A0F8-E304-4EFE-99C3-2247FC0978A5}"/>
+                <a16:creationId xmlns:a16="http://schemas.microsoft.com/office/drawing/2014/main" id="{E37074AC-B246-4391-B6E8-926EF5D895A0}"/>
               </a:ext>
             </a:extLst>
           </p:cNvPr>
@@ -6382,7 +6382,7 @@
           <p:cNvPr id="18" name="">
             <a:extLst xmlns:a="http://schemas.openxmlformats.org/drawingml/2006/main">
               <a:ext uri="{FF2B5EF4-FFF2-40B4-BE49-F238E27FC236}">
-                <a16:creationId xmlns:a16="http://schemas.microsoft.com/office/drawing/2014/main" id="{BABD8B67-79B2-4E8A-96F3-668D22282CC6}"/>
+                <a16:creationId xmlns:a16="http://schemas.microsoft.com/office/drawing/2014/main" id="{B1E36137-26FC-4A4E-99C0-4BB8667C8068}"/>
               </a:ext>
             </a:extLst>
           </p:cNvPr>
@@ -6416,7 +6416,7 @@
           <p:cNvPr id="19" name="">
             <a:extLst xmlns:a="http://schemas.openxmlformats.org/drawingml/2006/main">
               <a:ext uri="{FF2B5EF4-FFF2-40B4-BE49-F238E27FC236}">
-                <a16:creationId xmlns:a16="http://schemas.microsoft.com/office/drawing/2014/main" id="{A8024AE0-08AE-4B8F-A071-3A601335B35C}"/>
+                <a16:creationId xmlns:a16="http://schemas.microsoft.com/office/drawing/2014/main" id="{61C73DDF-3C52-41CE-886C-93408A4073C9}"/>
               </a:ext>
             </a:extLst>
           </p:cNvPr>
@@ -6448,7 +6448,7 @@
           <p:cNvPr id="20" name="">
             <a:extLst xmlns:a="http://schemas.openxmlformats.org/drawingml/2006/main">
               <a:ext uri="{FF2B5EF4-FFF2-40B4-BE49-F238E27FC236}">
-                <a16:creationId xmlns:a16="http://schemas.microsoft.com/office/drawing/2014/main" id="{BE2AF6CE-5EF2-4F00-B20E-8415B046FD01}"/>
+                <a16:creationId xmlns:a16="http://schemas.microsoft.com/office/drawing/2014/main" id="{BAD50956-D189-4E17-A287-7668E63A349F}"/>
               </a:ext>
             </a:extLst>
           </p:cNvPr>
@@ -6505,7 +6505,7 @@
           <p:cNvPr id="21" name="">
             <a:extLst xmlns:a="http://schemas.openxmlformats.org/drawingml/2006/main">
               <a:ext uri="{FF2B5EF4-FFF2-40B4-BE49-F238E27FC236}">
-                <a16:creationId xmlns:a16="http://schemas.microsoft.com/office/drawing/2014/main" id="{F01FB4F7-8BC3-40A2-8A01-9BCFBA191238}"/>
+                <a16:creationId xmlns:a16="http://schemas.microsoft.com/office/drawing/2014/main" id="{9B19C9F7-714B-43F6-B609-76D5C1073BD2}"/>
               </a:ext>
             </a:extLst>
           </p:cNvPr>
@@ -6562,7 +6562,7 @@
           <p:cNvPr id="22" name="">
             <a:extLst xmlns:a="http://schemas.openxmlformats.org/drawingml/2006/main">
               <a:ext uri="{FF2B5EF4-FFF2-40B4-BE49-F238E27FC236}">
-                <a16:creationId xmlns:a16="http://schemas.microsoft.com/office/drawing/2014/main" id="{A2FA3B14-21CF-4E22-BA01-11CDF71400C6}"/>
+                <a16:creationId xmlns:a16="http://schemas.microsoft.com/office/drawing/2014/main" id="{F4E56D43-4529-401D-88CB-3CB7DD9FA4BD}"/>
               </a:ext>
             </a:extLst>
           </p:cNvPr>
@@ -6617,7 +6617,7 @@
     </p:spTree>
     <p:extLst>
       <p:ext uri="{BB962C8B-B14F-4D97-AF65-F5344CB8AC3E}">
-        <p14:creationId xmlns:p14="http://schemas.microsoft.com/office/powerpoint/2010/main" val="146089940"/>
+        <p14:creationId xmlns:p14="http://schemas.microsoft.com/office/powerpoint/2010/main" val="256584302"/>
       </p:ext>
     </p:extLst>
   </p:cSld>
@@ -6818,7 +6818,7 @@
           <p:cNvPr id="16" name="">
             <a:extLst xmlns:a="http://schemas.openxmlformats.org/drawingml/2006/main">
               <a:ext uri="{FF2B5EF4-FFF2-40B4-BE49-F238E27FC236}">
-                <a16:creationId xmlns:a16="http://schemas.microsoft.com/office/drawing/2014/main" id="{63FE5F5D-9D90-47FB-B508-763A0DC53D22}"/>
+                <a16:creationId xmlns:a16="http://schemas.microsoft.com/office/drawing/2014/main" id="{8245D3F2-78D9-48E6-87FB-AF96F48BC482}"/>
               </a:ext>
             </a:extLst>
           </p:cNvPr>
@@ -6850,7 +6850,7 @@
           <p:cNvPr id="2" name="">
             <a:extLst xmlns:a="http://schemas.openxmlformats.org/drawingml/2006/main">
               <a:ext uri="{FF2B5EF4-FFF2-40B4-BE49-F238E27FC236}">
-                <a16:creationId xmlns:a16="http://schemas.microsoft.com/office/drawing/2014/main" id="{41E87746-ABDB-414C-9A33-72A41F2480DF}"/>
+                <a16:creationId xmlns:a16="http://schemas.microsoft.com/office/drawing/2014/main" id="{085BF45A-6BE9-4F11-9EA5-D7121221C5CC}"/>
               </a:ext>
             </a:extLst>
           </p:cNvPr>
@@ -6907,7 +6907,7 @@
           <p:cNvPr id="3" name="">
             <a:extLst xmlns:a="http://schemas.openxmlformats.org/drawingml/2006/main">
               <a:ext uri="{FF2B5EF4-FFF2-40B4-BE49-F238E27FC236}">
-                <a16:creationId xmlns:a16="http://schemas.microsoft.com/office/drawing/2014/main" id="{053D58CD-E3CB-40E2-AA89-01131EF998D9}"/>
+                <a16:creationId xmlns:a16="http://schemas.microsoft.com/office/drawing/2014/main" id="{29D60DF5-2B4F-484C-8489-12B00B44D5EE}"/>
               </a:ext>
             </a:extLst>
           </p:cNvPr>
@@ -6939,7 +6939,7 @@
           <p:cNvPr id="4" name="">
             <a:extLst xmlns:a="http://schemas.openxmlformats.org/drawingml/2006/main">
               <a:ext uri="{FF2B5EF4-FFF2-40B4-BE49-F238E27FC236}">
-                <a16:creationId xmlns:a16="http://schemas.microsoft.com/office/drawing/2014/main" id="{BCAC0483-247C-4DA6-B323-8EE2E64080C2}"/>
+                <a16:creationId xmlns:a16="http://schemas.microsoft.com/office/drawing/2014/main" id="{D337CE6B-F514-41B1-91C5-87138DDD63CD}"/>
               </a:ext>
             </a:extLst>
           </p:cNvPr>
@@ -6996,7 +6996,7 @@
           <p:cNvPr id="5" name="">
             <a:extLst xmlns:a="http://schemas.openxmlformats.org/drawingml/2006/main">
               <a:ext uri="{FF2B5EF4-FFF2-40B4-BE49-F238E27FC236}">
-                <a16:creationId xmlns:a16="http://schemas.microsoft.com/office/drawing/2014/main" id="{25D25370-4C20-4AA3-ABDF-B04343675624}"/>
+                <a16:creationId xmlns:a16="http://schemas.microsoft.com/office/drawing/2014/main" id="{69E9B96B-6993-406A-8A35-2776082EEFCF}"/>
               </a:ext>
             </a:extLst>
           </p:cNvPr>
@@ -7053,7 +7053,7 @@
           <p:cNvPr id="6" name="">
             <a:extLst xmlns:a="http://schemas.openxmlformats.org/drawingml/2006/main">
               <a:ext uri="{FF2B5EF4-FFF2-40B4-BE49-F238E27FC236}">
-                <a16:creationId xmlns:a16="http://schemas.microsoft.com/office/drawing/2014/main" id="{A8969D7F-F81C-4DCC-A8D9-667C76C6F87B}"/>
+                <a16:creationId xmlns:a16="http://schemas.microsoft.com/office/drawing/2014/main" id="{85E28961-531E-4147-9F80-F76F45254C1F}"/>
               </a:ext>
             </a:extLst>
           </p:cNvPr>
@@ -7110,7 +7110,7 @@
           <p:cNvPr id="7" name="">
             <a:extLst xmlns:a="http://schemas.openxmlformats.org/drawingml/2006/main">
               <a:ext uri="{FF2B5EF4-FFF2-40B4-BE49-F238E27FC236}">
-                <a16:creationId xmlns:a16="http://schemas.microsoft.com/office/drawing/2014/main" id="{56B163DA-0FB0-4CE6-B606-091B06EA3003}"/>
+                <a16:creationId xmlns:a16="http://schemas.microsoft.com/office/drawing/2014/main" id="{0DF5B639-E91A-496A-9514-A732828AB1B7}"/>
               </a:ext>
             </a:extLst>
           </p:cNvPr>
@@ -7142,7 +7142,7 @@
           <p:cNvPr id="8" name="">
             <a:extLst xmlns:a="http://schemas.openxmlformats.org/drawingml/2006/main">
               <a:ext uri="{FF2B5EF4-FFF2-40B4-BE49-F238E27FC236}">
-                <a16:creationId xmlns:a16="http://schemas.microsoft.com/office/drawing/2014/main" id="{14B72222-AFAB-44CC-BFC5-1C8EC7AADD31}"/>
+                <a16:creationId xmlns:a16="http://schemas.microsoft.com/office/drawing/2014/main" id="{BAD290EE-5F5B-4F7A-885D-CE97D9CBDF7F}"/>
               </a:ext>
             </a:extLst>
           </p:cNvPr>
@@ -7199,7 +7199,7 @@
           <p:cNvPr id="9" name="">
             <a:extLst xmlns:a="http://schemas.openxmlformats.org/drawingml/2006/main">
               <a:ext uri="{FF2B5EF4-FFF2-40B4-BE49-F238E27FC236}">
-                <a16:creationId xmlns:a16="http://schemas.microsoft.com/office/drawing/2014/main" id="{4D8D3E76-8169-48AF-98B9-357F49AD8AC8}"/>
+                <a16:creationId xmlns:a16="http://schemas.microsoft.com/office/drawing/2014/main" id="{B78BF410-5CA3-4BB2-A999-C077291D9BEB}"/>
               </a:ext>
             </a:extLst>
           </p:cNvPr>
@@ -7256,7 +7256,7 @@
           <p:cNvPr id="10" name="">
             <a:extLst xmlns:a="http://schemas.openxmlformats.org/drawingml/2006/main">
               <a:ext uri="{FF2B5EF4-FFF2-40B4-BE49-F238E27FC236}">
-                <a16:creationId xmlns:a16="http://schemas.microsoft.com/office/drawing/2014/main" id="{8AF8D81B-D93F-4EE8-BB11-159113FEA760}"/>
+                <a16:creationId xmlns:a16="http://schemas.microsoft.com/office/drawing/2014/main" id="{946C9709-0217-4E31-8726-D02B26538BA9}"/>
               </a:ext>
             </a:extLst>
           </p:cNvPr>
@@ -7313,7 +7313,7 @@
           <p:cNvPr id="11" name="">
             <a:extLst xmlns:a="http://schemas.openxmlformats.org/drawingml/2006/main">
               <a:ext uri="{FF2B5EF4-FFF2-40B4-BE49-F238E27FC236}">
-                <a16:creationId xmlns:a16="http://schemas.microsoft.com/office/drawing/2014/main" id="{A76C89E7-D3A8-46F3-A26D-A8379ADDD028}"/>
+                <a16:creationId xmlns:a16="http://schemas.microsoft.com/office/drawing/2014/main" id="{C6CD3C22-5377-4220-A724-17EB431597CE}"/>
               </a:ext>
             </a:extLst>
           </p:cNvPr>
@@ -7345,7 +7345,7 @@
           <p:cNvPr id="12" name="">
             <a:extLst xmlns:a="http://schemas.openxmlformats.org/drawingml/2006/main">
               <a:ext uri="{FF2B5EF4-FFF2-40B4-BE49-F238E27FC236}">
-                <a16:creationId xmlns:a16="http://schemas.microsoft.com/office/drawing/2014/main" id="{AA186118-1E59-4D6F-83FA-DE055C3C6D53}"/>
+                <a16:creationId xmlns:a16="http://schemas.microsoft.com/office/drawing/2014/main" id="{9E5CFD75-5848-4A79-8B6D-19FD813640A1}"/>
               </a:ext>
             </a:extLst>
           </p:cNvPr>
@@ -7402,7 +7402,7 @@
           <p:cNvPr id="13" name="">
             <a:extLst xmlns:a="http://schemas.openxmlformats.org/drawingml/2006/main">
               <a:ext uri="{FF2B5EF4-FFF2-40B4-BE49-F238E27FC236}">
-                <a16:creationId xmlns:a16="http://schemas.microsoft.com/office/drawing/2014/main" id="{8931935E-C758-4B09-8E66-AA807BEF4C55}"/>
+                <a16:creationId xmlns:a16="http://schemas.microsoft.com/office/drawing/2014/main" id="{DDBF70E0-7BBC-41AA-9AD1-4C665D743D1A}"/>
               </a:ext>
             </a:extLst>
           </p:cNvPr>
@@ -7459,7 +7459,7 @@
           <p:cNvPr id="14" name="">
             <a:extLst xmlns:a="http://schemas.openxmlformats.org/drawingml/2006/main">
               <a:ext uri="{FF2B5EF4-FFF2-40B4-BE49-F238E27FC236}">
-                <a16:creationId xmlns:a16="http://schemas.microsoft.com/office/drawing/2014/main" id="{E5E4A346-118E-478F-9162-10D68234D3BB}"/>
+                <a16:creationId xmlns:a16="http://schemas.microsoft.com/office/drawing/2014/main" id="{68BB7752-D65A-4D04-A3AC-1103DBBD899E}"/>
               </a:ext>
             </a:extLst>
           </p:cNvPr>
@@ -7516,7 +7516,7 @@
           <p:cNvPr id="15" name="">
             <a:extLst xmlns:a="http://schemas.openxmlformats.org/drawingml/2006/main">
               <a:ext uri="{FF2B5EF4-FFF2-40B4-BE49-F238E27FC236}">
-                <a16:creationId xmlns:a16="http://schemas.microsoft.com/office/drawing/2014/main" id="{E96771B8-ACB3-416F-8B1F-EE18DB79C651}"/>
+                <a16:creationId xmlns:a16="http://schemas.microsoft.com/office/drawing/2014/main" id="{00051A86-631A-414C-ADEE-FECD740FC05C}"/>
               </a:ext>
             </a:extLst>
           </p:cNvPr>
@@ -7571,7 +7571,7 @@
     </p:spTree>
     <p:extLst>
       <p:ext uri="{BB962C8B-B14F-4D97-AF65-F5344CB8AC3E}">
-        <p14:creationId xmlns:p14="http://schemas.microsoft.com/office/powerpoint/2010/main" val="786042191"/>
+        <p14:creationId xmlns:p14="http://schemas.microsoft.com/office/powerpoint/2010/main" val="968981105"/>
       </p:ext>
     </p:extLst>
   </p:cSld>
@@ -7772,7 +7772,7 @@
           <p:cNvPr id="23" name="">
             <a:extLst xmlns:a="http://schemas.openxmlformats.org/drawingml/2006/main">
               <a:ext uri="{FF2B5EF4-FFF2-40B4-BE49-F238E27FC236}">
-                <a16:creationId xmlns:a16="http://schemas.microsoft.com/office/drawing/2014/main" id="{919961D7-EACE-42D3-965F-0D02289DD0DD}"/>
+                <a16:creationId xmlns:a16="http://schemas.microsoft.com/office/drawing/2014/main" id="{ED77871A-FCA1-4A4F-96A6-CEC4CA709EF8}"/>
               </a:ext>
             </a:extLst>
           </p:cNvPr>
@@ -7804,7 +7804,7 @@
           <p:cNvPr id="2" name="">
             <a:extLst xmlns:a="http://schemas.openxmlformats.org/drawingml/2006/main">
               <a:ext uri="{FF2B5EF4-FFF2-40B4-BE49-F238E27FC236}">
-                <a16:creationId xmlns:a16="http://schemas.microsoft.com/office/drawing/2014/main" id="{4F6F6597-D6F0-40A1-8EAB-5EFCCE7D61D5}"/>
+                <a16:creationId xmlns:a16="http://schemas.microsoft.com/office/drawing/2014/main" id="{783D1C20-1986-4623-B6F2-A580EC5CE8E9}"/>
               </a:ext>
             </a:extLst>
           </p:cNvPr>
@@ -7861,7 +7861,7 @@
           <p:cNvPr id="3" name="">
             <a:extLst xmlns:a="http://schemas.openxmlformats.org/drawingml/2006/main">
               <a:ext uri="{FF2B5EF4-FFF2-40B4-BE49-F238E27FC236}">
-                <a16:creationId xmlns:a16="http://schemas.microsoft.com/office/drawing/2014/main" id="{461E161F-4B5C-47AE-A343-F1AD9F743EBF}"/>
+                <a16:creationId xmlns:a16="http://schemas.microsoft.com/office/drawing/2014/main" id="{AC450969-667D-4234-87A1-2743E7327325}"/>
               </a:ext>
             </a:extLst>
           </p:cNvPr>
@@ -7893,7 +7893,7 @@
           <p:cNvPr id="4" name="">
             <a:extLst xmlns:a="http://schemas.openxmlformats.org/drawingml/2006/main">
               <a:ext uri="{FF2B5EF4-FFF2-40B4-BE49-F238E27FC236}">
-                <a16:creationId xmlns:a16="http://schemas.microsoft.com/office/drawing/2014/main" id="{134CEA34-BA7C-46FC-B221-BFCC9CA0B211}"/>
+                <a16:creationId xmlns:a16="http://schemas.microsoft.com/office/drawing/2014/main" id="{44726E67-20B4-4A54-9463-8360EAC97731}"/>
               </a:ext>
             </a:extLst>
           </p:cNvPr>
@@ -7950,7 +7950,7 @@
           <p:cNvPr id="5" name="">
             <a:extLst xmlns:a="http://schemas.openxmlformats.org/drawingml/2006/main">
               <a:ext uri="{FF2B5EF4-FFF2-40B4-BE49-F238E27FC236}">
-                <a16:creationId xmlns:a16="http://schemas.microsoft.com/office/drawing/2014/main" id="{DA33741C-65B2-4AD8-A6A2-E486FABEDA99}"/>
+                <a16:creationId xmlns:a16="http://schemas.microsoft.com/office/drawing/2014/main" id="{BEC07A8B-590B-46E8-9F06-EB73872C4A40}"/>
               </a:ext>
             </a:extLst>
           </p:cNvPr>
@@ -8007,7 +8007,7 @@
           <p:cNvPr id="6" name="">
             <a:extLst xmlns:a="http://schemas.openxmlformats.org/drawingml/2006/main">
               <a:ext uri="{FF2B5EF4-FFF2-40B4-BE49-F238E27FC236}">
-                <a16:creationId xmlns:a16="http://schemas.microsoft.com/office/drawing/2014/main" id="{756E67B2-9694-4E33-ADA4-5B07666875EF}"/>
+                <a16:creationId xmlns:a16="http://schemas.microsoft.com/office/drawing/2014/main" id="{19A54C69-D67E-4217-BCDD-1B1F28A1EA05}"/>
               </a:ext>
             </a:extLst>
           </p:cNvPr>
@@ -8064,7 +8064,7 @@
           <p:cNvPr id="7" name="">
             <a:extLst xmlns:a="http://schemas.openxmlformats.org/drawingml/2006/main">
               <a:ext uri="{FF2B5EF4-FFF2-40B4-BE49-F238E27FC236}">
-                <a16:creationId xmlns:a16="http://schemas.microsoft.com/office/drawing/2014/main" id="{BD1F05FC-F67C-4DD3-BCA7-1FC0B8BDB669}"/>
+                <a16:creationId xmlns:a16="http://schemas.microsoft.com/office/drawing/2014/main" id="{9E7D6BA0-DFBE-4F0F-BE8A-B3A30A820145}"/>
               </a:ext>
             </a:extLst>
           </p:cNvPr>
@@ -8096,7 +8096,7 @@
           <p:cNvPr id="8" name="">
             <a:extLst xmlns:a="http://schemas.openxmlformats.org/drawingml/2006/main">
               <a:ext uri="{FF2B5EF4-FFF2-40B4-BE49-F238E27FC236}">
-                <a16:creationId xmlns:a16="http://schemas.microsoft.com/office/drawing/2014/main" id="{867927A3-45FC-4DCF-89F1-F15CF9175F6B}"/>
+                <a16:creationId xmlns:a16="http://schemas.microsoft.com/office/drawing/2014/main" id="{8ABE71DD-44D1-43B0-A1FD-40758CE925EB}"/>
               </a:ext>
             </a:extLst>
           </p:cNvPr>
@@ -8153,7 +8153,7 @@
           <p:cNvPr id="9" name="">
             <a:extLst xmlns:a="http://schemas.openxmlformats.org/drawingml/2006/main">
               <a:ext uri="{FF2B5EF4-FFF2-40B4-BE49-F238E27FC236}">
-                <a16:creationId xmlns:a16="http://schemas.microsoft.com/office/drawing/2014/main" id="{C9FFE423-C5BE-4476-9166-A7278D92C718}"/>
+                <a16:creationId xmlns:a16="http://schemas.microsoft.com/office/drawing/2014/main" id="{1CAC5555-5E84-4CF8-BC5E-E5FECD61D33F}"/>
               </a:ext>
             </a:extLst>
           </p:cNvPr>
@@ -8210,19 +8210,19 @@
           <p:cNvPr id="10" name="">
             <a:extLst xmlns:a="http://schemas.openxmlformats.org/drawingml/2006/main">
               <a:ext uri="{FF2B5EF4-FFF2-40B4-BE49-F238E27FC236}">
-                <a16:creationId xmlns:a16="http://schemas.microsoft.com/office/drawing/2014/main" id="{7A0E97F6-A4EB-43FF-B379-DC51CC7FAFD4}"/>
-              </a:ext>
-            </a:extLst>
-          </p:cNvPr>
-          <p:cNvSpPr>
-            <a:spLocks xmlns:a="http://schemas.openxmlformats.org/drawingml/2006/main" noGrp="1"/>
-          </p:cNvSpPr>
-          <p:nvPr/>
-        </p:nvSpPr>
-        <p:spPr>
-          <a:xfrm xmlns:a="http://schemas.openxmlformats.org/drawingml/2006/main">
-            <a:off x="914400" y="1257300"/>
-            <a:ext cx="10363200" cy="781050"/>
+                <a16:creationId xmlns:a16="http://schemas.microsoft.com/office/drawing/2014/main" id="{305D2347-2145-4B49-83E7-75090E09CE2E}"/>
+              </a:ext>
+            </a:extLst>
+          </p:cNvPr>
+          <p:cNvSpPr>
+            <a:spLocks xmlns:a="http://schemas.openxmlformats.org/drawingml/2006/main" noGrp="1"/>
+          </p:cNvSpPr>
+          <p:nvPr/>
+        </p:nvSpPr>
+        <p:spPr>
+          <a:xfrm xmlns:a="http://schemas.openxmlformats.org/drawingml/2006/main">
+            <a:off x="857250" y="1219200"/>
+            <a:ext cx="10477500" cy="742950"/>
           </a:xfrm>
           <a:prstGeom xmlns:a="http://schemas.openxmlformats.org/drawingml/2006/main" prst="rect">
             <a:avLst/>
@@ -8239,7 +8239,7 @@
           <a:lstStyle xmlns:a="http://schemas.openxmlformats.org/drawingml/2006/main"/>
           <a:p xmlns:a="http://schemas.openxmlformats.org/drawingml/2006/main">
             <a:pPr algn="ctr">
-              <a:defRPr sz="2175" b="1">
+              <a:defRPr sz="2100" b="1">
                 <a:solidFill>
                   <a:srgbClr val="17253A"/>
                 </a:solidFill>
@@ -8249,7 +8249,7 @@
               </a:defRPr>
             </a:pPr>
             <a:r>
-              <a:rPr sz="2175" b="1">
+              <a:rPr sz="2100" b="1">
                 <a:solidFill>
                   <a:srgbClr val="17253A"/>
                 </a:solidFill>
@@ -8267,28 +8267,30 @@
           <p:cNvPr id="11" name="">
             <a:extLst xmlns:a="http://schemas.openxmlformats.org/drawingml/2006/main">
               <a:ext uri="{FF2B5EF4-FFF2-40B4-BE49-F238E27FC236}">
-                <a16:creationId xmlns:a16="http://schemas.microsoft.com/office/drawing/2014/main" id="{EC2A505B-0A33-4237-8F61-4709CE82F61A}"/>
-              </a:ext>
-            </a:extLst>
-          </p:cNvPr>
-          <p:cNvSpPr>
-            <a:spLocks xmlns:a="http://schemas.openxmlformats.org/drawingml/2006/main" noGrp="1"/>
-          </p:cNvSpPr>
-          <p:nvPr/>
-        </p:nvSpPr>
-        <p:spPr>
-          <a:xfrm xmlns:a="http://schemas.openxmlformats.org/drawingml/2006/main">
-            <a:off x="1000125" y="2247900"/>
-            <a:ext cx="476250" cy="476250"/>
-          </a:xfrm>
-          <a:prstGeom xmlns:a="http://schemas.openxmlformats.org/drawingml/2006/main" prst="ellipse">
+                <a16:creationId xmlns:a16="http://schemas.microsoft.com/office/drawing/2014/main" id="{8FC6841F-5279-4958-A6CF-CFC32AC1F2BA}"/>
+              </a:ext>
+            </a:extLst>
+          </p:cNvPr>
+          <p:cNvSpPr>
+            <a:spLocks xmlns:a="http://schemas.openxmlformats.org/drawingml/2006/main" noGrp="1"/>
+          </p:cNvSpPr>
+          <p:nvPr/>
+        </p:nvSpPr>
+        <p:spPr>
+          <a:xfrm xmlns:a="http://schemas.openxmlformats.org/drawingml/2006/main">
+            <a:off x="971550" y="2124075"/>
+            <a:ext cx="38100" cy="3524250"/>
+          </a:xfrm>
+          <a:prstGeom xmlns:a="http://schemas.openxmlformats.org/drawingml/2006/main" prst="rect">
             <a:avLst/>
           </a:prstGeom>
           <a:solidFill xmlns:a="http://schemas.openxmlformats.org/drawingml/2006/main">
-            <a:srgbClr val="18324A"/>
+            <a:srgbClr val="2C6E73"/>
           </a:solidFill>
           <a:ln xmlns:a="http://schemas.openxmlformats.org/drawingml/2006/main" w="0">
-            <a:noFill/>
+            <a:solidFill>
+              <a:srgbClr val="2C6E73"/>
+            </a:solidFill>
           </a:ln>
         </p:spPr>
       </p:sp>
@@ -8297,19 +8299,19 @@
           <p:cNvPr id="12" name="">
             <a:extLst xmlns:a="http://schemas.openxmlformats.org/drawingml/2006/main">
               <a:ext uri="{FF2B5EF4-FFF2-40B4-BE49-F238E27FC236}">
-                <a16:creationId xmlns:a16="http://schemas.microsoft.com/office/drawing/2014/main" id="{0841DDA2-CBDC-427D-95D5-75D9E190989D}"/>
-              </a:ext>
-            </a:extLst>
-          </p:cNvPr>
-          <p:cNvSpPr>
-            <a:spLocks xmlns:a="http://schemas.openxmlformats.org/drawingml/2006/main" noGrp="1"/>
-          </p:cNvSpPr>
-          <p:nvPr/>
-        </p:nvSpPr>
-        <p:spPr>
-          <a:xfrm xmlns:a="http://schemas.openxmlformats.org/drawingml/2006/main">
-            <a:off x="1000125" y="2276475"/>
-            <a:ext cx="476250" cy="419100"/>
+                <a16:creationId xmlns:a16="http://schemas.microsoft.com/office/drawing/2014/main" id="{2C6EED61-48A3-4178-8B71-804A9001C731}"/>
+              </a:ext>
+            </a:extLst>
+          </p:cNvPr>
+          <p:cNvSpPr>
+            <a:spLocks xmlns:a="http://schemas.openxmlformats.org/drawingml/2006/main" noGrp="1"/>
+          </p:cNvSpPr>
+          <p:nvPr/>
+        </p:nvSpPr>
+        <p:spPr>
+          <a:xfrm xmlns:a="http://schemas.openxmlformats.org/drawingml/2006/main">
+            <a:off x="1162050" y="2200275"/>
+            <a:ext cx="400050" cy="400050"/>
           </a:xfrm>
           <a:prstGeom xmlns:a="http://schemas.openxmlformats.org/drawingml/2006/main" prst="rect">
             <a:avLst/>
@@ -8326,9 +8328,9 @@
           <a:lstStyle xmlns:a="http://schemas.openxmlformats.org/drawingml/2006/main"/>
           <a:p xmlns:a="http://schemas.openxmlformats.org/drawingml/2006/main">
             <a:pPr algn="ctr">
-              <a:defRPr sz="1350" b="1">
-                <a:solidFill>
-                  <a:srgbClr val="FFFFFF"/>
+              <a:defRPr sz="1125" b="1">
+                <a:solidFill>
+                  <a:srgbClr val="2C6E73"/>
                 </a:solidFill>
                 <a:latin typeface="Arial"/>
                 <a:ea typeface="Arial"/>
@@ -8336,9 +8338,9 @@
               </a:defRPr>
             </a:pPr>
             <a:r>
-              <a:rPr sz="1350" b="1">
-                <a:solidFill>
-                  <a:srgbClr val="FFFFFF"/>
+              <a:rPr sz="1125" b="1">
+                <a:solidFill>
+                  <a:srgbClr val="2C6E73"/>
                 </a:solidFill>
                 <a:latin typeface="Arial"/>
                 <a:ea typeface="Arial"/>
@@ -8354,19 +8356,19 @@
           <p:cNvPr id="13" name="">
             <a:extLst xmlns:a="http://schemas.openxmlformats.org/drawingml/2006/main">
               <a:ext uri="{FF2B5EF4-FFF2-40B4-BE49-F238E27FC236}">
-                <a16:creationId xmlns:a16="http://schemas.microsoft.com/office/drawing/2014/main" id="{342B8DC6-AF98-4592-9AFD-FFF004B1D19B}"/>
-              </a:ext>
-            </a:extLst>
-          </p:cNvPr>
-          <p:cNvSpPr>
-            <a:spLocks xmlns:a="http://schemas.openxmlformats.org/drawingml/2006/main" noGrp="1"/>
-          </p:cNvSpPr>
-          <p:nvPr/>
-        </p:nvSpPr>
-        <p:spPr>
-          <a:xfrm xmlns:a="http://schemas.openxmlformats.org/drawingml/2006/main">
-            <a:off x="1714500" y="2181225"/>
-            <a:ext cx="9429750" cy="609600"/>
+                <a16:creationId xmlns:a16="http://schemas.microsoft.com/office/drawing/2014/main" id="{C5251280-9915-469E-9B97-596B17E10F92}"/>
+              </a:ext>
+            </a:extLst>
+          </p:cNvPr>
+          <p:cNvSpPr>
+            <a:spLocks xmlns:a="http://schemas.openxmlformats.org/drawingml/2006/main" noGrp="1"/>
+          </p:cNvSpPr>
+          <p:nvPr/>
+        </p:nvSpPr>
+        <p:spPr>
+          <a:xfrm xmlns:a="http://schemas.openxmlformats.org/drawingml/2006/main">
+            <a:off x="1714500" y="2114550"/>
+            <a:ext cx="9525000" cy="809625"/>
           </a:xfrm>
           <a:prstGeom xmlns:a="http://schemas.openxmlformats.org/drawingml/2006/main" prst="rect">
             <a:avLst/>
@@ -8383,7 +8385,7 @@
           <a:lstStyle xmlns:a="http://schemas.openxmlformats.org/drawingml/2006/main"/>
           <a:p xmlns:a="http://schemas.openxmlformats.org/drawingml/2006/main">
             <a:pPr algn="l">
-              <a:defRPr sz="1500" b="0">
+              <a:defRPr sz="1725" b="0">
                 <a:solidFill>
                   <a:srgbClr val="17253A"/>
                 </a:solidFill>
@@ -8393,7 +8395,7 @@
               </a:defRPr>
             </a:pPr>
             <a:r>
-              <a:rPr sz="1500" b="0">
+              <a:rPr sz="1725" b="0">
                 <a:solidFill>
                   <a:srgbClr val="17253A"/>
                 </a:solidFill>
@@ -8401,7 +8403,7 @@
                 <a:ea typeface="Arial"/>
                 <a:cs typeface="Arial"/>
               </a:rPr>
-              <a:t>Identify the structure: Read the title, labels, scale and total before calculating.</a:t>
+              <a:t>Dataset A mean = 24</a:t>
             </a:r>
           </a:p>
         </p:txBody>
@@ -8411,28 +8413,30 @@
           <p:cNvPr id="14" name="">
             <a:extLst xmlns:a="http://schemas.openxmlformats.org/drawingml/2006/main">
               <a:ext uri="{FF2B5EF4-FFF2-40B4-BE49-F238E27FC236}">
-                <a16:creationId xmlns:a16="http://schemas.microsoft.com/office/drawing/2014/main" id="{0B4CD931-F5A8-4AEE-8C48-14F58D14C786}"/>
-              </a:ext>
-            </a:extLst>
-          </p:cNvPr>
-          <p:cNvSpPr>
-            <a:spLocks xmlns:a="http://schemas.openxmlformats.org/drawingml/2006/main" noGrp="1"/>
-          </p:cNvSpPr>
-          <p:nvPr/>
-        </p:nvSpPr>
-        <p:spPr>
-          <a:xfrm xmlns:a="http://schemas.openxmlformats.org/drawingml/2006/main">
-            <a:off x="1000125" y="2990850"/>
-            <a:ext cx="476250" cy="476250"/>
-          </a:xfrm>
-          <a:prstGeom xmlns:a="http://schemas.openxmlformats.org/drawingml/2006/main" prst="ellipse">
+                <a16:creationId xmlns:a16="http://schemas.microsoft.com/office/drawing/2014/main" id="{8E3979F8-D18D-4D3E-9167-4DC25799FFAF}"/>
+              </a:ext>
+            </a:extLst>
+          </p:cNvPr>
+          <p:cNvSpPr>
+            <a:spLocks xmlns:a="http://schemas.openxmlformats.org/drawingml/2006/main" noGrp="1"/>
+          </p:cNvSpPr>
+          <p:nvPr/>
+        </p:nvSpPr>
+        <p:spPr>
+          <a:xfrm xmlns:a="http://schemas.openxmlformats.org/drawingml/2006/main">
+            <a:off x="1714500" y="2943225"/>
+            <a:ext cx="9334500" cy="9525"/>
+          </a:xfrm>
+          <a:prstGeom xmlns:a="http://schemas.openxmlformats.org/drawingml/2006/main" prst="rect">
             <a:avLst/>
           </a:prstGeom>
           <a:solidFill xmlns:a="http://schemas.openxmlformats.org/drawingml/2006/main">
-            <a:srgbClr val="2C6E73"/>
+            <a:srgbClr val="D9E0E6"/>
           </a:solidFill>
           <a:ln xmlns:a="http://schemas.openxmlformats.org/drawingml/2006/main" w="0">
-            <a:noFill/>
+            <a:solidFill>
+              <a:srgbClr val="D9E0E6"/>
+            </a:solidFill>
           </a:ln>
         </p:spPr>
       </p:sp>
@@ -8441,19 +8445,19 @@
           <p:cNvPr id="15" name="">
             <a:extLst xmlns:a="http://schemas.openxmlformats.org/drawingml/2006/main">
               <a:ext uri="{FF2B5EF4-FFF2-40B4-BE49-F238E27FC236}">
-                <a16:creationId xmlns:a16="http://schemas.microsoft.com/office/drawing/2014/main" id="{4F98D258-1348-4410-8C22-711656573811}"/>
-              </a:ext>
-            </a:extLst>
-          </p:cNvPr>
-          <p:cNvSpPr>
-            <a:spLocks xmlns:a="http://schemas.openxmlformats.org/drawingml/2006/main" noGrp="1"/>
-          </p:cNvSpPr>
-          <p:nvPr/>
-        </p:nvSpPr>
-        <p:spPr>
-          <a:xfrm xmlns:a="http://schemas.openxmlformats.org/drawingml/2006/main">
-            <a:off x="1000125" y="3019425"/>
-            <a:ext cx="476250" cy="419100"/>
+                <a16:creationId xmlns:a16="http://schemas.microsoft.com/office/drawing/2014/main" id="{1F00B5FA-F6F2-4F6A-8B80-F181B69C7F8E}"/>
+              </a:ext>
+            </a:extLst>
+          </p:cNvPr>
+          <p:cNvSpPr>
+            <a:spLocks xmlns:a="http://schemas.openxmlformats.org/drawingml/2006/main" noGrp="1"/>
+          </p:cNvSpPr>
+          <p:nvPr/>
+        </p:nvSpPr>
+        <p:spPr>
+          <a:xfrm xmlns:a="http://schemas.openxmlformats.org/drawingml/2006/main">
+            <a:off x="1162050" y="3076575"/>
+            <a:ext cx="400050" cy="400050"/>
           </a:xfrm>
           <a:prstGeom xmlns:a="http://schemas.openxmlformats.org/drawingml/2006/main" prst="rect">
             <a:avLst/>
@@ -8470,9 +8474,9 @@
           <a:lstStyle xmlns:a="http://schemas.openxmlformats.org/drawingml/2006/main"/>
           <a:p xmlns:a="http://schemas.openxmlformats.org/drawingml/2006/main">
             <a:pPr algn="ctr">
-              <a:defRPr sz="1350" b="1">
-                <a:solidFill>
-                  <a:srgbClr val="FFFFFF"/>
+              <a:defRPr sz="1125" b="1">
+                <a:solidFill>
+                  <a:srgbClr val="2C6E73"/>
                 </a:solidFill>
                 <a:latin typeface="Arial"/>
                 <a:ea typeface="Arial"/>
@@ -8480,9 +8484,9 @@
               </a:defRPr>
             </a:pPr>
             <a:r>
-              <a:rPr sz="1350" b="1">
-                <a:solidFill>
-                  <a:srgbClr val="FFFFFF"/>
+              <a:rPr sz="1125" b="1">
+                <a:solidFill>
+                  <a:srgbClr val="2C6E73"/>
                 </a:solidFill>
                 <a:latin typeface="Arial"/>
                 <a:ea typeface="Arial"/>
@@ -8498,19 +8502,19 @@
           <p:cNvPr id="16" name="">
             <a:extLst xmlns:a="http://schemas.openxmlformats.org/drawingml/2006/main">
               <a:ext uri="{FF2B5EF4-FFF2-40B4-BE49-F238E27FC236}">
-                <a16:creationId xmlns:a16="http://schemas.microsoft.com/office/drawing/2014/main" id="{A52D6224-8EDA-44C3-B2C4-485590AB4C70}"/>
-              </a:ext>
-            </a:extLst>
-          </p:cNvPr>
-          <p:cNvSpPr>
-            <a:spLocks xmlns:a="http://schemas.openxmlformats.org/drawingml/2006/main" noGrp="1"/>
-          </p:cNvSpPr>
-          <p:nvPr/>
-        </p:nvSpPr>
-        <p:spPr>
-          <a:xfrm xmlns:a="http://schemas.openxmlformats.org/drawingml/2006/main">
-            <a:off x="1714500" y="2924175"/>
-            <a:ext cx="9429750" cy="609600"/>
+                <a16:creationId xmlns:a16="http://schemas.microsoft.com/office/drawing/2014/main" id="{31E3B6A3-3FD4-454C-A3AF-A53F76E4A9FB}"/>
+              </a:ext>
+            </a:extLst>
+          </p:cNvPr>
+          <p:cNvSpPr>
+            <a:spLocks xmlns:a="http://schemas.openxmlformats.org/drawingml/2006/main" noGrp="1"/>
+          </p:cNvSpPr>
+          <p:nvPr/>
+        </p:nvSpPr>
+        <p:spPr>
+          <a:xfrm xmlns:a="http://schemas.openxmlformats.org/drawingml/2006/main">
+            <a:off x="1714500" y="2990850"/>
+            <a:ext cx="9525000" cy="809625"/>
           </a:xfrm>
           <a:prstGeom xmlns:a="http://schemas.openxmlformats.org/drawingml/2006/main" prst="rect">
             <a:avLst/>
@@ -8527,7 +8531,7 @@
           <a:lstStyle xmlns:a="http://schemas.openxmlformats.org/drawingml/2006/main"/>
           <a:p xmlns:a="http://schemas.openxmlformats.org/drawingml/2006/main">
             <a:pPr algn="l">
-              <a:defRPr sz="1500" b="0">
+              <a:defRPr sz="1725" b="0">
                 <a:solidFill>
                   <a:srgbClr val="17253A"/>
                 </a:solidFill>
@@ -8537,7 +8541,7 @@
               </a:defRPr>
             </a:pPr>
             <a:r>
-              <a:rPr sz="1500" b="0">
+              <a:rPr sz="1725" b="0">
                 <a:solidFill>
                   <a:srgbClr val="17253A"/>
                 </a:solidFill>
@@ -8545,7 +8549,7 @@
                 <a:ea typeface="Arial"/>
                 <a:cs typeface="Arial"/>
               </a:rPr>
-              <a:t>Set up the method: Use proportional reasoning or add then divide for the mean.</a:t>
+              <a:t>Dataset B mean = 207 ÷ 9 = 23</a:t>
             </a:r>
           </a:p>
         </p:txBody>
@@ -8555,28 +8559,30 @@
           <p:cNvPr id="17" name="">
             <a:extLst xmlns:a="http://schemas.openxmlformats.org/drawingml/2006/main">
               <a:ext uri="{FF2B5EF4-FFF2-40B4-BE49-F238E27FC236}">
-                <a16:creationId xmlns:a16="http://schemas.microsoft.com/office/drawing/2014/main" id="{D9851FE2-E7DA-4A4F-8FF3-2ED66288F669}"/>
-              </a:ext>
-            </a:extLst>
-          </p:cNvPr>
-          <p:cNvSpPr>
-            <a:spLocks xmlns:a="http://schemas.openxmlformats.org/drawingml/2006/main" noGrp="1"/>
-          </p:cNvSpPr>
-          <p:nvPr/>
-        </p:nvSpPr>
-        <p:spPr>
-          <a:xfrm xmlns:a="http://schemas.openxmlformats.org/drawingml/2006/main">
-            <a:off x="1000125" y="3733800"/>
-            <a:ext cx="476250" cy="476250"/>
-          </a:xfrm>
-          <a:prstGeom xmlns:a="http://schemas.openxmlformats.org/drawingml/2006/main" prst="ellipse">
+                <a16:creationId xmlns:a16="http://schemas.microsoft.com/office/drawing/2014/main" id="{06F48F0F-0BE5-47EB-A8B5-F0D371133146}"/>
+              </a:ext>
+            </a:extLst>
+          </p:cNvPr>
+          <p:cNvSpPr>
+            <a:spLocks xmlns:a="http://schemas.openxmlformats.org/drawingml/2006/main" noGrp="1"/>
+          </p:cNvSpPr>
+          <p:nvPr/>
+        </p:nvSpPr>
+        <p:spPr>
+          <a:xfrm xmlns:a="http://schemas.openxmlformats.org/drawingml/2006/main">
+            <a:off x="1714500" y="3819525"/>
+            <a:ext cx="9334500" cy="9525"/>
+          </a:xfrm>
+          <a:prstGeom xmlns:a="http://schemas.openxmlformats.org/drawingml/2006/main" prst="rect">
             <a:avLst/>
           </a:prstGeom>
           <a:solidFill xmlns:a="http://schemas.openxmlformats.org/drawingml/2006/main">
-            <a:srgbClr val="2C6E73"/>
+            <a:srgbClr val="D9E0E6"/>
           </a:solidFill>
           <a:ln xmlns:a="http://schemas.openxmlformats.org/drawingml/2006/main" w="0">
-            <a:noFill/>
+            <a:solidFill>
+              <a:srgbClr val="D9E0E6"/>
+            </a:solidFill>
           </a:ln>
         </p:spPr>
       </p:sp>
@@ -8585,19 +8591,19 @@
           <p:cNvPr id="18" name="">
             <a:extLst xmlns:a="http://schemas.openxmlformats.org/drawingml/2006/main">
               <a:ext uri="{FF2B5EF4-FFF2-40B4-BE49-F238E27FC236}">
-                <a16:creationId xmlns:a16="http://schemas.microsoft.com/office/drawing/2014/main" id="{8C7FEBD0-6133-4669-A45A-6E6455028E08}"/>
-              </a:ext>
-            </a:extLst>
-          </p:cNvPr>
-          <p:cNvSpPr>
-            <a:spLocks xmlns:a="http://schemas.openxmlformats.org/drawingml/2006/main" noGrp="1"/>
-          </p:cNvSpPr>
-          <p:nvPr/>
-        </p:nvSpPr>
-        <p:spPr>
-          <a:xfrm xmlns:a="http://schemas.openxmlformats.org/drawingml/2006/main">
-            <a:off x="1000125" y="3762375"/>
-            <a:ext cx="476250" cy="419100"/>
+                <a16:creationId xmlns:a16="http://schemas.microsoft.com/office/drawing/2014/main" id="{7C2E9340-1D1A-4BDE-AD95-134BD5E1B174}"/>
+              </a:ext>
+            </a:extLst>
+          </p:cNvPr>
+          <p:cNvSpPr>
+            <a:spLocks xmlns:a="http://schemas.openxmlformats.org/drawingml/2006/main" noGrp="1"/>
+          </p:cNvSpPr>
+          <p:nvPr/>
+        </p:nvSpPr>
+        <p:spPr>
+          <a:xfrm xmlns:a="http://schemas.openxmlformats.org/drawingml/2006/main">
+            <a:off x="1162050" y="3952875"/>
+            <a:ext cx="400050" cy="400050"/>
           </a:xfrm>
           <a:prstGeom xmlns:a="http://schemas.openxmlformats.org/drawingml/2006/main" prst="rect">
             <a:avLst/>
@@ -8614,9 +8620,9 @@
           <a:lstStyle xmlns:a="http://schemas.openxmlformats.org/drawingml/2006/main"/>
           <a:p xmlns:a="http://schemas.openxmlformats.org/drawingml/2006/main">
             <a:pPr algn="ctr">
-              <a:defRPr sz="1350" b="1">
-                <a:solidFill>
-                  <a:srgbClr val="FFFFFF"/>
+              <a:defRPr sz="1125" b="1">
+                <a:solidFill>
+                  <a:srgbClr val="2C6E73"/>
                 </a:solidFill>
                 <a:latin typeface="Arial"/>
                 <a:ea typeface="Arial"/>
@@ -8624,9 +8630,9 @@
               </a:defRPr>
             </a:pPr>
             <a:r>
-              <a:rPr sz="1350" b="1">
-                <a:solidFill>
-                  <a:srgbClr val="FFFFFF"/>
+              <a:rPr sz="1125" b="1">
+                <a:solidFill>
+                  <a:srgbClr val="2C6E73"/>
                 </a:solidFill>
                 <a:latin typeface="Arial"/>
                 <a:ea typeface="Arial"/>
@@ -8642,19 +8648,19 @@
           <p:cNvPr id="19" name="">
             <a:extLst xmlns:a="http://schemas.openxmlformats.org/drawingml/2006/main">
               <a:ext uri="{FF2B5EF4-FFF2-40B4-BE49-F238E27FC236}">
-                <a16:creationId xmlns:a16="http://schemas.microsoft.com/office/drawing/2014/main" id="{F8411BC8-1447-4143-A6BC-19C1D06FB833}"/>
-              </a:ext>
-            </a:extLst>
-          </p:cNvPr>
-          <p:cNvSpPr>
-            <a:spLocks xmlns:a="http://schemas.openxmlformats.org/drawingml/2006/main" noGrp="1"/>
-          </p:cNvSpPr>
-          <p:nvPr/>
-        </p:nvSpPr>
-        <p:spPr>
-          <a:xfrm xmlns:a="http://schemas.openxmlformats.org/drawingml/2006/main">
-            <a:off x="1714500" y="3667125"/>
-            <a:ext cx="9429750" cy="609600"/>
+                <a16:creationId xmlns:a16="http://schemas.microsoft.com/office/drawing/2014/main" id="{4993E39F-BCFA-405F-A02C-FB6568105953}"/>
+              </a:ext>
+            </a:extLst>
+          </p:cNvPr>
+          <p:cNvSpPr>
+            <a:spLocks xmlns:a="http://schemas.openxmlformats.org/drawingml/2006/main" noGrp="1"/>
+          </p:cNvSpPr>
+          <p:nvPr/>
+        </p:nvSpPr>
+        <p:spPr>
+          <a:xfrm xmlns:a="http://schemas.openxmlformats.org/drawingml/2006/main">
+            <a:off x="1714500" y="3867150"/>
+            <a:ext cx="9525000" cy="809625"/>
           </a:xfrm>
           <a:prstGeom xmlns:a="http://schemas.openxmlformats.org/drawingml/2006/main" prst="rect">
             <a:avLst/>
@@ -8671,7 +8677,7 @@
           <a:lstStyle xmlns:a="http://schemas.openxmlformats.org/drawingml/2006/main"/>
           <a:p xmlns:a="http://schemas.openxmlformats.org/drawingml/2006/main">
             <a:pPr algn="l">
-              <a:defRPr sz="1500" b="0">
+              <a:defRPr sz="1725" b="0">
                 <a:solidFill>
                   <a:srgbClr val="17253A"/>
                 </a:solidFill>
@@ -8681,7 +8687,7 @@
               </a:defRPr>
             </a:pPr>
             <a:r>
-              <a:rPr sz="1500" b="0">
+              <a:rPr sz="1725" b="0">
                 <a:solidFill>
                   <a:srgbClr val="17253A"/>
                 </a:solidFill>
@@ -8689,7 +8695,7 @@
                 <a:ea typeface="Arial"/>
                 <a:cs typeface="Arial"/>
               </a:rPr>
-              <a:t>Complete the calculation: Dataset A: 24; Dataset B: 23, so A is greater.</a:t>
+              <a:t>24 &gt; 23</a:t>
             </a:r>
           </a:p>
         </p:txBody>
@@ -8699,28 +8705,30 @@
           <p:cNvPr id="20" name="">
             <a:extLst xmlns:a="http://schemas.openxmlformats.org/drawingml/2006/main">
               <a:ext uri="{FF2B5EF4-FFF2-40B4-BE49-F238E27FC236}">
-                <a16:creationId xmlns:a16="http://schemas.microsoft.com/office/drawing/2014/main" id="{B745FE06-1451-4A11-AF6F-8CBBEF47BADE}"/>
-              </a:ext>
-            </a:extLst>
-          </p:cNvPr>
-          <p:cNvSpPr>
-            <a:spLocks xmlns:a="http://schemas.openxmlformats.org/drawingml/2006/main" noGrp="1"/>
-          </p:cNvSpPr>
-          <p:nvPr/>
-        </p:nvSpPr>
-        <p:spPr>
-          <a:xfrm xmlns:a="http://schemas.openxmlformats.org/drawingml/2006/main">
-            <a:off x="1000125" y="4476750"/>
-            <a:ext cx="476250" cy="476250"/>
-          </a:xfrm>
-          <a:prstGeom xmlns:a="http://schemas.openxmlformats.org/drawingml/2006/main" prst="ellipse">
+                <a16:creationId xmlns:a16="http://schemas.microsoft.com/office/drawing/2014/main" id="{D94D63F4-72E7-49A4-8078-D5ED2B53C857}"/>
+              </a:ext>
+            </a:extLst>
+          </p:cNvPr>
+          <p:cNvSpPr>
+            <a:spLocks xmlns:a="http://schemas.openxmlformats.org/drawingml/2006/main" noGrp="1"/>
+          </p:cNvSpPr>
+          <p:nvPr/>
+        </p:nvSpPr>
+        <p:spPr>
+          <a:xfrm xmlns:a="http://schemas.openxmlformats.org/drawingml/2006/main">
+            <a:off x="1714500" y="4695825"/>
+            <a:ext cx="9334500" cy="9525"/>
+          </a:xfrm>
+          <a:prstGeom xmlns:a="http://schemas.openxmlformats.org/drawingml/2006/main" prst="rect">
             <a:avLst/>
           </a:prstGeom>
           <a:solidFill xmlns:a="http://schemas.openxmlformats.org/drawingml/2006/main">
-            <a:srgbClr val="2C6E73"/>
+            <a:srgbClr val="D9E0E6"/>
           </a:solidFill>
           <a:ln xmlns:a="http://schemas.openxmlformats.org/drawingml/2006/main" w="0">
-            <a:noFill/>
+            <a:solidFill>
+              <a:srgbClr val="D9E0E6"/>
+            </a:solidFill>
           </a:ln>
         </p:spPr>
       </p:sp>
@@ -8729,19 +8737,19 @@
           <p:cNvPr id="21" name="">
             <a:extLst xmlns:a="http://schemas.openxmlformats.org/drawingml/2006/main">
               <a:ext uri="{FF2B5EF4-FFF2-40B4-BE49-F238E27FC236}">
-                <a16:creationId xmlns:a16="http://schemas.microsoft.com/office/drawing/2014/main" id="{9F5D3485-8BAF-4E48-91FD-F47A281E046B}"/>
-              </a:ext>
-            </a:extLst>
-          </p:cNvPr>
-          <p:cNvSpPr>
-            <a:spLocks xmlns:a="http://schemas.openxmlformats.org/drawingml/2006/main" noGrp="1"/>
-          </p:cNvSpPr>
-          <p:nvPr/>
-        </p:nvSpPr>
-        <p:spPr>
-          <a:xfrm xmlns:a="http://schemas.openxmlformats.org/drawingml/2006/main">
-            <a:off x="1000125" y="4505325"/>
-            <a:ext cx="476250" cy="419100"/>
+                <a16:creationId xmlns:a16="http://schemas.microsoft.com/office/drawing/2014/main" id="{68132935-D032-4B9B-830C-84648A0AB067}"/>
+              </a:ext>
+            </a:extLst>
+          </p:cNvPr>
+          <p:cNvSpPr>
+            <a:spLocks xmlns:a="http://schemas.openxmlformats.org/drawingml/2006/main" noGrp="1"/>
+          </p:cNvSpPr>
+          <p:nvPr/>
+        </p:nvSpPr>
+        <p:spPr>
+          <a:xfrm xmlns:a="http://schemas.openxmlformats.org/drawingml/2006/main">
+            <a:off x="1162050" y="4829175"/>
+            <a:ext cx="400050" cy="400050"/>
           </a:xfrm>
           <a:prstGeom xmlns:a="http://schemas.openxmlformats.org/drawingml/2006/main" prst="rect">
             <a:avLst/>
@@ -8758,9 +8766,9 @@
           <a:lstStyle xmlns:a="http://schemas.openxmlformats.org/drawingml/2006/main"/>
           <a:p xmlns:a="http://schemas.openxmlformats.org/drawingml/2006/main">
             <a:pPr algn="ctr">
-              <a:defRPr sz="1350" b="1">
-                <a:solidFill>
-                  <a:srgbClr val="FFFFFF"/>
+              <a:defRPr sz="1125" b="1">
+                <a:solidFill>
+                  <a:srgbClr val="2F785D"/>
                 </a:solidFill>
                 <a:latin typeface="Arial"/>
                 <a:ea typeface="Arial"/>
@@ -8768,9 +8776,9 @@
               </a:defRPr>
             </a:pPr>
             <a:r>
-              <a:rPr sz="1350" b="1">
-                <a:solidFill>
-                  <a:srgbClr val="FFFFFF"/>
+              <a:rPr sz="1125" b="1">
+                <a:solidFill>
+                  <a:srgbClr val="2F785D"/>
                 </a:solidFill>
                 <a:latin typeface="Arial"/>
                 <a:ea typeface="Arial"/>
@@ -8786,19 +8794,19 @@
           <p:cNvPr id="22" name="">
             <a:extLst xmlns:a="http://schemas.openxmlformats.org/drawingml/2006/main">
               <a:ext uri="{FF2B5EF4-FFF2-40B4-BE49-F238E27FC236}">
-                <a16:creationId xmlns:a16="http://schemas.microsoft.com/office/drawing/2014/main" id="{37F11DB9-5BC8-4EA8-8A8C-4BCD22A925AB}"/>
-              </a:ext>
-            </a:extLst>
-          </p:cNvPr>
-          <p:cNvSpPr>
-            <a:spLocks xmlns:a="http://schemas.openxmlformats.org/drawingml/2006/main" noGrp="1"/>
-          </p:cNvSpPr>
-          <p:nvPr/>
-        </p:nvSpPr>
-        <p:spPr>
-          <a:xfrm xmlns:a="http://schemas.openxmlformats.org/drawingml/2006/main">
-            <a:off x="1714500" y="4410075"/>
-            <a:ext cx="9429750" cy="609600"/>
+                <a16:creationId xmlns:a16="http://schemas.microsoft.com/office/drawing/2014/main" id="{443E265E-78B2-4FC7-A95E-62184E3745CC}"/>
+              </a:ext>
+            </a:extLst>
+          </p:cNvPr>
+          <p:cNvSpPr>
+            <a:spLocks xmlns:a="http://schemas.openxmlformats.org/drawingml/2006/main" noGrp="1"/>
+          </p:cNvSpPr>
+          <p:nvPr/>
+        </p:nvSpPr>
+        <p:spPr>
+          <a:xfrm xmlns:a="http://schemas.openxmlformats.org/drawingml/2006/main">
+            <a:off x="1714500" y="4743450"/>
+            <a:ext cx="9525000" cy="809625"/>
           </a:xfrm>
           <a:prstGeom xmlns:a="http://schemas.openxmlformats.org/drawingml/2006/main" prst="rect">
             <a:avLst/>
@@ -8815,7 +8823,7 @@
           <a:lstStyle xmlns:a="http://schemas.openxmlformats.org/drawingml/2006/main"/>
           <a:p xmlns:a="http://schemas.openxmlformats.org/drawingml/2006/main">
             <a:pPr algn="l">
-              <a:defRPr sz="1500" b="1">
+              <a:defRPr sz="1725" b="1">
                 <a:solidFill>
                   <a:srgbClr val="2F785D"/>
                 </a:solidFill>
@@ -8825,7 +8833,7 @@
               </a:defRPr>
             </a:pPr>
             <a:r>
-              <a:rPr sz="1500" b="1">
+              <a:rPr sz="1725" b="1">
                 <a:solidFill>
                   <a:srgbClr val="2F785D"/>
                 </a:solidFill>
@@ -8833,7 +8841,7 @@
                 <a:ea typeface="Arial"/>
                 <a:cs typeface="Arial"/>
               </a:rPr>
-              <a:t>Check the result: State the answer in context and check it against the data range.</a:t>
+              <a:t>Dataset A has the greater mean</a:t>
             </a:r>
           </a:p>
         </p:txBody>
@@ -8841,7 +8849,7 @@
     </p:spTree>
     <p:extLst>
       <p:ext uri="{BB962C8B-B14F-4D97-AF65-F5344CB8AC3E}">
-        <p14:creationId xmlns:p14="http://schemas.microsoft.com/office/powerpoint/2010/main" val="861967913"/>
+        <p14:creationId xmlns:p14="http://schemas.microsoft.com/office/powerpoint/2010/main" val="869032458"/>
       </p:ext>
     </p:extLst>
   </p:cSld>
@@ -9134,7 +9142,7 @@
           <p:cNvPr id="15" name="">
             <a:extLst xmlns:a="http://schemas.openxmlformats.org/drawingml/2006/main">
               <a:ext uri="{FF2B5EF4-FFF2-40B4-BE49-F238E27FC236}">
-                <a16:creationId xmlns:a16="http://schemas.microsoft.com/office/drawing/2014/main" id="{D3036F2C-D9EC-487D-BEF6-73D8A9110FFD}"/>
+                <a16:creationId xmlns:a16="http://schemas.microsoft.com/office/drawing/2014/main" id="{2B699A5B-7935-41D5-BCCA-C57717F8E1BB}"/>
               </a:ext>
             </a:extLst>
           </p:cNvPr>
@@ -9166,7 +9174,7 @@
           <p:cNvPr id="2" name="">
             <a:extLst xmlns:a="http://schemas.openxmlformats.org/drawingml/2006/main">
               <a:ext uri="{FF2B5EF4-FFF2-40B4-BE49-F238E27FC236}">
-                <a16:creationId xmlns:a16="http://schemas.microsoft.com/office/drawing/2014/main" id="{F80DD9B9-C438-4BCF-AB17-02B4E9546855}"/>
+                <a16:creationId xmlns:a16="http://schemas.microsoft.com/office/drawing/2014/main" id="{8E0794E5-3648-4241-84DE-62A38ECD05E1}"/>
               </a:ext>
             </a:extLst>
           </p:cNvPr>
@@ -9223,7 +9231,7 @@
           <p:cNvPr id="3" name="">
             <a:extLst xmlns:a="http://schemas.openxmlformats.org/drawingml/2006/main">
               <a:ext uri="{FF2B5EF4-FFF2-40B4-BE49-F238E27FC236}">
-                <a16:creationId xmlns:a16="http://schemas.microsoft.com/office/drawing/2014/main" id="{7AADA648-809D-4BEA-B2D9-FCF1AEA0BD27}"/>
+                <a16:creationId xmlns:a16="http://schemas.microsoft.com/office/drawing/2014/main" id="{44202BAE-A5E5-46C0-B12F-773721BECD3A}"/>
               </a:ext>
             </a:extLst>
           </p:cNvPr>
@@ -9255,7 +9263,7 @@
           <p:cNvPr id="4" name="">
             <a:extLst xmlns:a="http://schemas.openxmlformats.org/drawingml/2006/main">
               <a:ext uri="{FF2B5EF4-FFF2-40B4-BE49-F238E27FC236}">
-                <a16:creationId xmlns:a16="http://schemas.microsoft.com/office/drawing/2014/main" id="{CF781814-0D74-4BA0-A10C-A7218F40EDD5}"/>
+                <a16:creationId xmlns:a16="http://schemas.microsoft.com/office/drawing/2014/main" id="{D167F524-6107-4B33-9BF8-3758A8FFCBB0}"/>
               </a:ext>
             </a:extLst>
           </p:cNvPr>
@@ -9312,7 +9320,7 @@
           <p:cNvPr id="5" name="">
             <a:extLst xmlns:a="http://schemas.openxmlformats.org/drawingml/2006/main">
               <a:ext uri="{FF2B5EF4-FFF2-40B4-BE49-F238E27FC236}">
-                <a16:creationId xmlns:a16="http://schemas.microsoft.com/office/drawing/2014/main" id="{9B488017-DF69-4828-A5A7-ACE14C693936}"/>
+                <a16:creationId xmlns:a16="http://schemas.microsoft.com/office/drawing/2014/main" id="{43F1E5CD-DDD7-43BA-BF7B-0F4EEC260798}"/>
               </a:ext>
             </a:extLst>
           </p:cNvPr>
@@ -9369,7 +9377,7 @@
           <p:cNvPr id="6" name="">
             <a:extLst xmlns:a="http://schemas.openxmlformats.org/drawingml/2006/main">
               <a:ext uri="{FF2B5EF4-FFF2-40B4-BE49-F238E27FC236}">
-                <a16:creationId xmlns:a16="http://schemas.microsoft.com/office/drawing/2014/main" id="{DDAB4824-C1BC-4686-BD92-D43BF89EF187}"/>
+                <a16:creationId xmlns:a16="http://schemas.microsoft.com/office/drawing/2014/main" id="{A642FFA5-5B85-4EF3-B3A7-5E2A024E43E2}"/>
               </a:ext>
             </a:extLst>
           </p:cNvPr>
@@ -9426,7 +9434,7 @@
           <p:cNvPr id="7" name="">
             <a:extLst xmlns:a="http://schemas.openxmlformats.org/drawingml/2006/main">
               <a:ext uri="{FF2B5EF4-FFF2-40B4-BE49-F238E27FC236}">
-                <a16:creationId xmlns:a16="http://schemas.microsoft.com/office/drawing/2014/main" id="{C11B5EC8-8467-457A-AC5C-D2C866ECFACA}"/>
+                <a16:creationId xmlns:a16="http://schemas.microsoft.com/office/drawing/2014/main" id="{4089F68E-8DE1-4CF8-B0D6-C7FB453338E5}"/>
               </a:ext>
             </a:extLst>
           </p:cNvPr>
@@ -9458,7 +9466,7 @@
           <p:cNvPr id="8" name="">
             <a:extLst xmlns:a="http://schemas.openxmlformats.org/drawingml/2006/main">
               <a:ext uri="{FF2B5EF4-FFF2-40B4-BE49-F238E27FC236}">
-                <a16:creationId xmlns:a16="http://schemas.microsoft.com/office/drawing/2014/main" id="{ED96010F-B646-4D79-9C36-6F920B6AD923}"/>
+                <a16:creationId xmlns:a16="http://schemas.microsoft.com/office/drawing/2014/main" id="{0E7AEE96-84F6-419D-9BE2-ABC9AC639932}"/>
               </a:ext>
             </a:extLst>
           </p:cNvPr>
@@ -9515,7 +9523,7 @@
           <p:cNvPr id="9" name="">
             <a:extLst xmlns:a="http://schemas.openxmlformats.org/drawingml/2006/main">
               <a:ext uri="{FF2B5EF4-FFF2-40B4-BE49-F238E27FC236}">
-                <a16:creationId xmlns:a16="http://schemas.microsoft.com/office/drawing/2014/main" id="{BDD98DCB-D176-4B98-B8F4-E5C13BBF8DC8}"/>
+                <a16:creationId xmlns:a16="http://schemas.microsoft.com/office/drawing/2014/main" id="{F36A2D40-269E-427F-9E6E-EEE6F5FEA569}"/>
               </a:ext>
             </a:extLst>
           </p:cNvPr>
@@ -9572,7 +9580,7 @@
           <p:cNvPr id="10" name="">
             <a:extLst xmlns:a="http://schemas.openxmlformats.org/drawingml/2006/main">
               <a:ext uri="{FF2B5EF4-FFF2-40B4-BE49-F238E27FC236}">
-                <a16:creationId xmlns:a16="http://schemas.microsoft.com/office/drawing/2014/main" id="{5E6C8847-8803-4CE4-9EFB-D46A7D9E2662}"/>
+                <a16:creationId xmlns:a16="http://schemas.microsoft.com/office/drawing/2014/main" id="{8EAF6C44-63AE-4D36-BBEA-BCEDBA1D8688}"/>
               </a:ext>
             </a:extLst>
           </p:cNvPr>
@@ -9629,7 +9637,7 @@
           <p:cNvPr id="11" name="">
             <a:extLst xmlns:a="http://schemas.openxmlformats.org/drawingml/2006/main">
               <a:ext uri="{FF2B5EF4-FFF2-40B4-BE49-F238E27FC236}">
-                <a16:creationId xmlns:a16="http://schemas.microsoft.com/office/drawing/2014/main" id="{797D4211-4B97-4EC9-8B87-FDC6ED4FED5E}"/>
+                <a16:creationId xmlns:a16="http://schemas.microsoft.com/office/drawing/2014/main" id="{10CD5F74-B60F-4AA9-BEC6-5B7FBFE56F4C}"/>
               </a:ext>
             </a:extLst>
           </p:cNvPr>
@@ -9686,7 +9694,7 @@
           <p:cNvPr id="12" name="">
             <a:extLst xmlns:a="http://schemas.openxmlformats.org/drawingml/2006/main">
               <a:ext uri="{FF2B5EF4-FFF2-40B4-BE49-F238E27FC236}">
-                <a16:creationId xmlns:a16="http://schemas.microsoft.com/office/drawing/2014/main" id="{5100DEFF-8A03-48C3-A8FF-E4BE674122E9}"/>
+                <a16:creationId xmlns:a16="http://schemas.microsoft.com/office/drawing/2014/main" id="{02BFCCBF-651E-4EA8-B61E-909E8B9191FF}"/>
               </a:ext>
             </a:extLst>
           </p:cNvPr>
@@ -9718,7 +9726,7 @@
           <p:cNvPr id="13" name="">
             <a:extLst xmlns:a="http://schemas.openxmlformats.org/drawingml/2006/main">
               <a:ext uri="{FF2B5EF4-FFF2-40B4-BE49-F238E27FC236}">
-                <a16:creationId xmlns:a16="http://schemas.microsoft.com/office/drawing/2014/main" id="{D449774A-6E71-4D29-830C-C8E8D0234219}"/>
+                <a16:creationId xmlns:a16="http://schemas.microsoft.com/office/drawing/2014/main" id="{E64E2659-DAEB-474B-A312-EBE250EC93D6}"/>
               </a:ext>
             </a:extLst>
           </p:cNvPr>
@@ -9775,7 +9783,7 @@
           <p:cNvPr id="14" name="">
             <a:extLst xmlns:a="http://schemas.openxmlformats.org/drawingml/2006/main">
               <a:ext uri="{FF2B5EF4-FFF2-40B4-BE49-F238E27FC236}">
-                <a16:creationId xmlns:a16="http://schemas.microsoft.com/office/drawing/2014/main" id="{CBF83F8C-B197-49D2-8814-E8F86E0D1CF0}"/>
+                <a16:creationId xmlns:a16="http://schemas.microsoft.com/office/drawing/2014/main" id="{87C3C9A1-C846-4E01-A2D8-E5D0E21B37FA}"/>
               </a:ext>
             </a:extLst>
           </p:cNvPr>
@@ -9830,7 +9838,7 @@
     </p:spTree>
     <p:extLst>
       <p:ext uri="{BB962C8B-B14F-4D97-AF65-F5344CB8AC3E}">
-        <p14:creationId xmlns:p14="http://schemas.microsoft.com/office/powerpoint/2010/main" val="1576284799"/>
+        <p14:creationId xmlns:p14="http://schemas.microsoft.com/office/powerpoint/2010/main" val="1269216898"/>
       </p:ext>
     </p:extLst>
   </p:cSld>
@@ -10031,7 +10039,7 @@
           <p:cNvPr id="16" name="">
             <a:extLst xmlns:a="http://schemas.openxmlformats.org/drawingml/2006/main">
               <a:ext uri="{FF2B5EF4-FFF2-40B4-BE49-F238E27FC236}">
-                <a16:creationId xmlns:a16="http://schemas.microsoft.com/office/drawing/2014/main" id="{D0713227-A94D-4B3A-9C6A-71A93BDF2822}"/>
+                <a16:creationId xmlns:a16="http://schemas.microsoft.com/office/drawing/2014/main" id="{8E99DCEC-E7BF-4529-9EE0-87CD4909DF18}"/>
               </a:ext>
             </a:extLst>
           </p:cNvPr>
@@ -10063,7 +10071,7 @@
           <p:cNvPr id="2" name="">
             <a:extLst xmlns:a="http://schemas.openxmlformats.org/drawingml/2006/main">
               <a:ext uri="{FF2B5EF4-FFF2-40B4-BE49-F238E27FC236}">
-                <a16:creationId xmlns:a16="http://schemas.microsoft.com/office/drawing/2014/main" id="{4213B861-5F28-4245-9F7E-85399E9AF93D}"/>
+                <a16:creationId xmlns:a16="http://schemas.microsoft.com/office/drawing/2014/main" id="{03128E4B-B035-4FAA-A051-D61DA0294370}"/>
               </a:ext>
             </a:extLst>
           </p:cNvPr>
@@ -10120,7 +10128,7 @@
           <p:cNvPr id="3" name="">
             <a:extLst xmlns:a="http://schemas.openxmlformats.org/drawingml/2006/main">
               <a:ext uri="{FF2B5EF4-FFF2-40B4-BE49-F238E27FC236}">
-                <a16:creationId xmlns:a16="http://schemas.microsoft.com/office/drawing/2014/main" id="{83EC364B-D488-4A5B-824F-8661F0DB9130}"/>
+                <a16:creationId xmlns:a16="http://schemas.microsoft.com/office/drawing/2014/main" id="{11EE8B50-0461-4089-BFF9-9C8E950B97DD}"/>
               </a:ext>
             </a:extLst>
           </p:cNvPr>
@@ -10152,7 +10160,7 @@
           <p:cNvPr id="4" name="">
             <a:extLst xmlns:a="http://schemas.openxmlformats.org/drawingml/2006/main">
               <a:ext uri="{FF2B5EF4-FFF2-40B4-BE49-F238E27FC236}">
-                <a16:creationId xmlns:a16="http://schemas.microsoft.com/office/drawing/2014/main" id="{EB1083B3-68BF-4B16-A905-D4EF3985F869}"/>
+                <a16:creationId xmlns:a16="http://schemas.microsoft.com/office/drawing/2014/main" id="{DF8A0419-2159-44BE-9C96-31E9476C3F36}"/>
               </a:ext>
             </a:extLst>
           </p:cNvPr>
@@ -10209,7 +10217,7 @@
           <p:cNvPr id="5" name="">
             <a:extLst xmlns:a="http://schemas.openxmlformats.org/drawingml/2006/main">
               <a:ext uri="{FF2B5EF4-FFF2-40B4-BE49-F238E27FC236}">
-                <a16:creationId xmlns:a16="http://schemas.microsoft.com/office/drawing/2014/main" id="{84898B0C-69CE-4AE4-A092-A31EF876338B}"/>
+                <a16:creationId xmlns:a16="http://schemas.microsoft.com/office/drawing/2014/main" id="{71D3BFD6-16A3-4283-AEF0-51170843858C}"/>
               </a:ext>
             </a:extLst>
           </p:cNvPr>
@@ -10266,7 +10274,7 @@
           <p:cNvPr id="6" name="">
             <a:extLst xmlns:a="http://schemas.openxmlformats.org/drawingml/2006/main">
               <a:ext uri="{FF2B5EF4-FFF2-40B4-BE49-F238E27FC236}">
-                <a16:creationId xmlns:a16="http://schemas.microsoft.com/office/drawing/2014/main" id="{2A824816-1F3C-4630-BCDF-7B3E117262E0}"/>
+                <a16:creationId xmlns:a16="http://schemas.microsoft.com/office/drawing/2014/main" id="{C9687C35-2B91-4459-87E6-CA7A3D2B6E75}"/>
               </a:ext>
             </a:extLst>
           </p:cNvPr>
@@ -10323,7 +10331,7 @@
           <p:cNvPr id="7" name="">
             <a:extLst xmlns:a="http://schemas.openxmlformats.org/drawingml/2006/main">
               <a:ext uri="{FF2B5EF4-FFF2-40B4-BE49-F238E27FC236}">
-                <a16:creationId xmlns:a16="http://schemas.microsoft.com/office/drawing/2014/main" id="{A6954DE6-BFC4-4DB8-A91E-3B6BE44354B8}"/>
+                <a16:creationId xmlns:a16="http://schemas.microsoft.com/office/drawing/2014/main" id="{9DB9A33A-8082-4C1E-A7BE-B611A26B8182}"/>
               </a:ext>
             </a:extLst>
           </p:cNvPr>
@@ -10355,7 +10363,7 @@
           <p:cNvPr id="8" name="">
             <a:extLst xmlns:a="http://schemas.openxmlformats.org/drawingml/2006/main">
               <a:ext uri="{FF2B5EF4-FFF2-40B4-BE49-F238E27FC236}">
-                <a16:creationId xmlns:a16="http://schemas.microsoft.com/office/drawing/2014/main" id="{92200724-1653-4329-8E8E-910FEECA4938}"/>
+                <a16:creationId xmlns:a16="http://schemas.microsoft.com/office/drawing/2014/main" id="{CDE3FBC7-8F6F-4BD9-8012-E8463CEA554E}"/>
               </a:ext>
             </a:extLst>
           </p:cNvPr>
@@ -10412,7 +10420,7 @@
           <p:cNvPr id="9" name="">
             <a:extLst xmlns:a="http://schemas.openxmlformats.org/drawingml/2006/main">
               <a:ext uri="{FF2B5EF4-FFF2-40B4-BE49-F238E27FC236}">
-                <a16:creationId xmlns:a16="http://schemas.microsoft.com/office/drawing/2014/main" id="{C45CA265-00A2-4306-A923-E90505617810}"/>
+                <a16:creationId xmlns:a16="http://schemas.microsoft.com/office/drawing/2014/main" id="{2AEB3153-3193-47B9-B8B5-91D4141401EF}"/>
               </a:ext>
             </a:extLst>
           </p:cNvPr>
@@ -10469,7 +10477,7 @@
           <p:cNvPr id="10" name="">
             <a:extLst xmlns:a="http://schemas.openxmlformats.org/drawingml/2006/main">
               <a:ext uri="{FF2B5EF4-FFF2-40B4-BE49-F238E27FC236}">
-                <a16:creationId xmlns:a16="http://schemas.microsoft.com/office/drawing/2014/main" id="{D92D25AC-FEDC-46EC-9A4E-8D3AE75052DD}"/>
+                <a16:creationId xmlns:a16="http://schemas.microsoft.com/office/drawing/2014/main" id="{248F0135-E7EE-4621-9236-E457ED33B76E}"/>
               </a:ext>
             </a:extLst>
           </p:cNvPr>
@@ -10526,7 +10534,7 @@
           <p:cNvPr id="11" name="">
             <a:extLst xmlns:a="http://schemas.openxmlformats.org/drawingml/2006/main">
               <a:ext uri="{FF2B5EF4-FFF2-40B4-BE49-F238E27FC236}">
-                <a16:creationId xmlns:a16="http://schemas.microsoft.com/office/drawing/2014/main" id="{5E2566AA-7687-4951-97CD-CAA0C841AF1D}"/>
+                <a16:creationId xmlns:a16="http://schemas.microsoft.com/office/drawing/2014/main" id="{AF98D7F8-B766-431F-9C9D-5F9D7553AF84}"/>
               </a:ext>
             </a:extLst>
           </p:cNvPr>
@@ -10583,7 +10591,7 @@
           <p:cNvPr id="12" name="">
             <a:extLst xmlns:a="http://schemas.openxmlformats.org/drawingml/2006/main">
               <a:ext uri="{FF2B5EF4-FFF2-40B4-BE49-F238E27FC236}">
-                <a16:creationId xmlns:a16="http://schemas.microsoft.com/office/drawing/2014/main" id="{9651246A-9515-4B0C-B786-A7A9BF3A7AB3}"/>
+                <a16:creationId xmlns:a16="http://schemas.microsoft.com/office/drawing/2014/main" id="{B7D2A584-8463-452C-A87D-683EB09C6D31}"/>
               </a:ext>
             </a:extLst>
           </p:cNvPr>
@@ -10640,7 +10648,7 @@
           <p:cNvPr id="13" name="">
             <a:extLst xmlns:a="http://schemas.openxmlformats.org/drawingml/2006/main">
               <a:ext uri="{FF2B5EF4-FFF2-40B4-BE49-F238E27FC236}">
-                <a16:creationId xmlns:a16="http://schemas.microsoft.com/office/drawing/2014/main" id="{53119963-B3A8-40A7-865F-4BF86C90F8B3}"/>
+                <a16:creationId xmlns:a16="http://schemas.microsoft.com/office/drawing/2014/main" id="{42D9ABDA-5946-49E7-B063-9F170DCC6D0E}"/>
               </a:ext>
             </a:extLst>
           </p:cNvPr>
@@ -10697,7 +10705,7 @@
           <p:cNvPr id="14" name="">
             <a:extLst xmlns:a="http://schemas.openxmlformats.org/drawingml/2006/main">
               <a:ext uri="{FF2B5EF4-FFF2-40B4-BE49-F238E27FC236}">
-                <a16:creationId xmlns:a16="http://schemas.microsoft.com/office/drawing/2014/main" id="{53E628B3-7E01-4440-BDDC-7672113E3605}"/>
+                <a16:creationId xmlns:a16="http://schemas.microsoft.com/office/drawing/2014/main" id="{17367208-436E-424C-97F1-9216394A7789}"/>
               </a:ext>
             </a:extLst>
           </p:cNvPr>
@@ -10754,7 +10762,7 @@
           <p:cNvPr id="15" name="">
             <a:extLst xmlns:a="http://schemas.openxmlformats.org/drawingml/2006/main">
               <a:ext uri="{FF2B5EF4-FFF2-40B4-BE49-F238E27FC236}">
-                <a16:creationId xmlns:a16="http://schemas.microsoft.com/office/drawing/2014/main" id="{46010D97-C91B-48C9-AB15-5C13A42CC20C}"/>
+                <a16:creationId xmlns:a16="http://schemas.microsoft.com/office/drawing/2014/main" id="{AA815C59-BB18-4A59-B4C0-19274E93C3C2}"/>
               </a:ext>
             </a:extLst>
           </p:cNvPr>
@@ -10809,7 +10817,7 @@
     </p:spTree>
     <p:extLst>
       <p:ext uri="{BB962C8B-B14F-4D97-AF65-F5344CB8AC3E}">
-        <p14:creationId xmlns:p14="http://schemas.microsoft.com/office/powerpoint/2010/main" val="392487155"/>
+        <p14:creationId xmlns:p14="http://schemas.microsoft.com/office/powerpoint/2010/main" val="1504769859"/>
       </p:ext>
     </p:extLst>
   </p:cSld>
@@ -10964,7 +10972,7 @@
           <p:cNvPr id="16" name="">
             <a:extLst xmlns:a="http://schemas.openxmlformats.org/drawingml/2006/main">
               <a:ext uri="{FF2B5EF4-FFF2-40B4-BE49-F238E27FC236}">
-                <a16:creationId xmlns:a16="http://schemas.microsoft.com/office/drawing/2014/main" id="{CDC3B4EE-C50C-4C75-9456-196A0973BB11}"/>
+                <a16:creationId xmlns:a16="http://schemas.microsoft.com/office/drawing/2014/main" id="{91F31CA2-F19E-4F3C-B8CA-DA75D7F8D8EF}"/>
               </a:ext>
             </a:extLst>
           </p:cNvPr>
@@ -10996,7 +11004,7 @@
           <p:cNvPr id="2" name="">
             <a:extLst xmlns:a="http://schemas.openxmlformats.org/drawingml/2006/main">
               <a:ext uri="{FF2B5EF4-FFF2-40B4-BE49-F238E27FC236}">
-                <a16:creationId xmlns:a16="http://schemas.microsoft.com/office/drawing/2014/main" id="{F1A4F38A-47EC-4E79-B579-A11F6B74229D}"/>
+                <a16:creationId xmlns:a16="http://schemas.microsoft.com/office/drawing/2014/main" id="{29D00032-6FF9-4971-9CA5-FA3CA53494E0}"/>
               </a:ext>
             </a:extLst>
           </p:cNvPr>
@@ -11053,7 +11061,7 @@
           <p:cNvPr id="3" name="">
             <a:extLst xmlns:a="http://schemas.openxmlformats.org/drawingml/2006/main">
               <a:ext uri="{FF2B5EF4-FFF2-40B4-BE49-F238E27FC236}">
-                <a16:creationId xmlns:a16="http://schemas.microsoft.com/office/drawing/2014/main" id="{053448F6-EEEC-4BC9-B607-6BF1709F357A}"/>
+                <a16:creationId xmlns:a16="http://schemas.microsoft.com/office/drawing/2014/main" id="{CC0E485A-345D-431E-8C08-4C055869CCEE}"/>
               </a:ext>
             </a:extLst>
           </p:cNvPr>
@@ -11085,7 +11093,7 @@
           <p:cNvPr id="4" name="">
             <a:extLst xmlns:a="http://schemas.openxmlformats.org/drawingml/2006/main">
               <a:ext uri="{FF2B5EF4-FFF2-40B4-BE49-F238E27FC236}">
-                <a16:creationId xmlns:a16="http://schemas.microsoft.com/office/drawing/2014/main" id="{957D9A39-2BE2-4D8C-B36F-3ED08797036F}"/>
+                <a16:creationId xmlns:a16="http://schemas.microsoft.com/office/drawing/2014/main" id="{FFE38894-6C87-4AAB-8F63-834B5C27E253}"/>
               </a:ext>
             </a:extLst>
           </p:cNvPr>
@@ -11142,7 +11150,7 @@
           <p:cNvPr id="5" name="">
             <a:extLst xmlns:a="http://schemas.openxmlformats.org/drawingml/2006/main">
               <a:ext uri="{FF2B5EF4-FFF2-40B4-BE49-F238E27FC236}">
-                <a16:creationId xmlns:a16="http://schemas.microsoft.com/office/drawing/2014/main" id="{0FAE65C8-1D72-4DE7-AA4F-F84E074D278E}"/>
+                <a16:creationId xmlns:a16="http://schemas.microsoft.com/office/drawing/2014/main" id="{8A2839C8-496C-4092-AD21-7F17E98C97FA}"/>
               </a:ext>
             </a:extLst>
           </p:cNvPr>
@@ -11199,7 +11207,7 @@
           <p:cNvPr id="6" name="">
             <a:extLst xmlns:a="http://schemas.openxmlformats.org/drawingml/2006/main">
               <a:ext uri="{FF2B5EF4-FFF2-40B4-BE49-F238E27FC236}">
-                <a16:creationId xmlns:a16="http://schemas.microsoft.com/office/drawing/2014/main" id="{F94F4520-FC87-4DB3-99B3-F200BCD3D112}"/>
+                <a16:creationId xmlns:a16="http://schemas.microsoft.com/office/drawing/2014/main" id="{CBC4305D-E8E2-4947-ABAC-931B34451106}"/>
               </a:ext>
             </a:extLst>
           </p:cNvPr>
@@ -11256,7 +11264,7 @@
           <p:cNvPr id="7" name="">
             <a:extLst xmlns:a="http://schemas.openxmlformats.org/drawingml/2006/main">
               <a:ext uri="{FF2B5EF4-FFF2-40B4-BE49-F238E27FC236}">
-                <a16:creationId xmlns:a16="http://schemas.microsoft.com/office/drawing/2014/main" id="{2EE70034-A36F-48DA-9A06-A46D3B8836F3}"/>
+                <a16:creationId xmlns:a16="http://schemas.microsoft.com/office/drawing/2014/main" id="{9FCECDCC-A139-47C2-ABB4-2FDAA2AFD830}"/>
               </a:ext>
             </a:extLst>
           </p:cNvPr>
@@ -11288,7 +11296,7 @@
           <p:cNvPr id="8" name="">
             <a:extLst xmlns:a="http://schemas.openxmlformats.org/drawingml/2006/main">
               <a:ext uri="{FF2B5EF4-FFF2-40B4-BE49-F238E27FC236}">
-                <a16:creationId xmlns:a16="http://schemas.microsoft.com/office/drawing/2014/main" id="{684CDF59-FE80-41FD-8A43-FF756D1BEC1A}"/>
+                <a16:creationId xmlns:a16="http://schemas.microsoft.com/office/drawing/2014/main" id="{41F05189-C012-426C-8D5A-B4B03E7BEEA4}"/>
               </a:ext>
             </a:extLst>
           </p:cNvPr>
@@ -11345,7 +11353,7 @@
           <p:cNvPr id="9" name="">
             <a:extLst xmlns:a="http://schemas.openxmlformats.org/drawingml/2006/main">
               <a:ext uri="{FF2B5EF4-FFF2-40B4-BE49-F238E27FC236}">
-                <a16:creationId xmlns:a16="http://schemas.microsoft.com/office/drawing/2014/main" id="{39A8D4DD-1FF3-4E9C-860F-7C9032879953}"/>
+                <a16:creationId xmlns:a16="http://schemas.microsoft.com/office/drawing/2014/main" id="{FA816EC3-F505-451F-9882-1E1B11979815}"/>
               </a:ext>
             </a:extLst>
           </p:cNvPr>
@@ -11406,7 +11414,7 @@
           <p:nvPr/>
         </p:nvPicPr>
         <p:blipFill>
-          <a:blip xmlns:r="http://schemas.openxmlformats.org/officeDocument/2006/relationships" xmlns:a="http://schemas.openxmlformats.org/drawingml/2006/main" r:embed="R52094863e53245fc"/>
+          <a:blip xmlns:r="http://schemas.openxmlformats.org/officeDocument/2006/relationships" xmlns:a="http://schemas.openxmlformats.org/drawingml/2006/main" r:embed="R3ada0767c1324334"/>
           <a:stretch xmlns:a="http://schemas.openxmlformats.org/drawingml/2006/main"/>
         </p:blipFill>
         <p:spPr>
@@ -11424,7 +11432,7 @@
           <p:cNvPr id="11" name="">
             <a:extLst xmlns:a="http://schemas.openxmlformats.org/drawingml/2006/main">
               <a:ext uri="{FF2B5EF4-FFF2-40B4-BE49-F238E27FC236}">
-                <a16:creationId xmlns:a16="http://schemas.microsoft.com/office/drawing/2014/main" id="{D4687336-7878-417D-9308-61E00925E615}"/>
+                <a16:creationId xmlns:a16="http://schemas.microsoft.com/office/drawing/2014/main" id="{19AD0C36-F6C1-4228-B672-DF2360DC8D17}"/>
               </a:ext>
             </a:extLst>
           </p:cNvPr>
@@ -11481,7 +11489,7 @@
           <p:cNvPr id="12" name="">
             <a:extLst xmlns:a="http://schemas.openxmlformats.org/drawingml/2006/main">
               <a:ext uri="{FF2B5EF4-FFF2-40B4-BE49-F238E27FC236}">
-                <a16:creationId xmlns:a16="http://schemas.microsoft.com/office/drawing/2014/main" id="{659095C5-562A-4FFC-96FC-6CB8A04CD213}"/>
+                <a16:creationId xmlns:a16="http://schemas.microsoft.com/office/drawing/2014/main" id="{61FD0ADA-C201-4E7F-812E-7DF5031CBCCB}"/>
               </a:ext>
             </a:extLst>
           </p:cNvPr>
@@ -11538,7 +11546,7 @@
           <p:cNvPr id="13" name="">
             <a:extLst xmlns:a="http://schemas.openxmlformats.org/drawingml/2006/main">
               <a:ext uri="{FF2B5EF4-FFF2-40B4-BE49-F238E27FC236}">
-                <a16:creationId xmlns:a16="http://schemas.microsoft.com/office/drawing/2014/main" id="{03BEBBBB-B678-4BD8-8267-F654825E3984}"/>
+                <a16:creationId xmlns:a16="http://schemas.microsoft.com/office/drawing/2014/main" id="{8417EBCB-42A5-4BCD-963C-BB7DD37FF02A}"/>
               </a:ext>
             </a:extLst>
           </p:cNvPr>
@@ -11570,7 +11578,7 @@
           <p:cNvPr id="14" name="">
             <a:extLst xmlns:a="http://schemas.openxmlformats.org/drawingml/2006/main">
               <a:ext uri="{FF2B5EF4-FFF2-40B4-BE49-F238E27FC236}">
-                <a16:creationId xmlns:a16="http://schemas.microsoft.com/office/drawing/2014/main" id="{11A2874B-C6F0-4F0C-8731-F52CB276644F}"/>
+                <a16:creationId xmlns:a16="http://schemas.microsoft.com/office/drawing/2014/main" id="{BCA4F010-3326-4D68-9DD5-EFEAEEDAFE4C}"/>
               </a:ext>
             </a:extLst>
           </p:cNvPr>
@@ -11627,7 +11635,7 @@
           <p:cNvPr id="15" name="">
             <a:extLst xmlns:a="http://schemas.openxmlformats.org/drawingml/2006/main">
               <a:ext uri="{FF2B5EF4-FFF2-40B4-BE49-F238E27FC236}">
-                <a16:creationId xmlns:a16="http://schemas.microsoft.com/office/drawing/2014/main" id="{4B8E9E8F-50BC-4205-BD24-97064A7BBE88}"/>
+                <a16:creationId xmlns:a16="http://schemas.microsoft.com/office/drawing/2014/main" id="{1166C1C2-E157-4869-A255-8F006127FF27}"/>
               </a:ext>
             </a:extLst>
           </p:cNvPr>
@@ -11682,7 +11690,7 @@
     </p:spTree>
     <p:extLst>
       <p:ext uri="{BB962C8B-B14F-4D97-AF65-F5344CB8AC3E}">
-        <p14:creationId xmlns:p14="http://schemas.microsoft.com/office/powerpoint/2010/main" val="424521895"/>
+        <p14:creationId xmlns:p14="http://schemas.microsoft.com/office/powerpoint/2010/main" val="864146754"/>
       </p:ext>
     </p:extLst>
   </p:cSld>
@@ -11837,7 +11845,7 @@
           <p:cNvPr id="23" name="">
             <a:extLst xmlns:a="http://schemas.openxmlformats.org/drawingml/2006/main">
               <a:ext uri="{FF2B5EF4-FFF2-40B4-BE49-F238E27FC236}">
-                <a16:creationId xmlns:a16="http://schemas.microsoft.com/office/drawing/2014/main" id="{5EE220F9-67D5-4B6C-8FC6-92C709C5718E}"/>
+                <a16:creationId xmlns:a16="http://schemas.microsoft.com/office/drawing/2014/main" id="{3614B5DA-913B-49BF-B320-5756D76BC8E1}"/>
               </a:ext>
             </a:extLst>
           </p:cNvPr>
@@ -11869,7 +11877,7 @@
           <p:cNvPr id="2" name="">
             <a:extLst xmlns:a="http://schemas.openxmlformats.org/drawingml/2006/main">
               <a:ext uri="{FF2B5EF4-FFF2-40B4-BE49-F238E27FC236}">
-                <a16:creationId xmlns:a16="http://schemas.microsoft.com/office/drawing/2014/main" id="{EED15E0B-ABF7-4CBF-96E3-4115D735F61E}"/>
+                <a16:creationId xmlns:a16="http://schemas.microsoft.com/office/drawing/2014/main" id="{47BEA5B0-6552-4037-A918-41038F498EC6}"/>
               </a:ext>
             </a:extLst>
           </p:cNvPr>
@@ -11926,7 +11934,7 @@
           <p:cNvPr id="3" name="">
             <a:extLst xmlns:a="http://schemas.openxmlformats.org/drawingml/2006/main">
               <a:ext uri="{FF2B5EF4-FFF2-40B4-BE49-F238E27FC236}">
-                <a16:creationId xmlns:a16="http://schemas.microsoft.com/office/drawing/2014/main" id="{5B632734-59BD-4321-AFB0-90797E79B11B}"/>
+                <a16:creationId xmlns:a16="http://schemas.microsoft.com/office/drawing/2014/main" id="{06E82C54-58C1-4275-912A-4922F7EBAED0}"/>
               </a:ext>
             </a:extLst>
           </p:cNvPr>
@@ -11958,7 +11966,7 @@
           <p:cNvPr id="4" name="">
             <a:extLst xmlns:a="http://schemas.openxmlformats.org/drawingml/2006/main">
               <a:ext uri="{FF2B5EF4-FFF2-40B4-BE49-F238E27FC236}">
-                <a16:creationId xmlns:a16="http://schemas.microsoft.com/office/drawing/2014/main" id="{581C5AF5-CB1C-4CA6-B895-BD105E565787}"/>
+                <a16:creationId xmlns:a16="http://schemas.microsoft.com/office/drawing/2014/main" id="{FCABB59A-0B70-49E0-AC0B-C230FC1FFA23}"/>
               </a:ext>
             </a:extLst>
           </p:cNvPr>
@@ -12015,7 +12023,7 @@
           <p:cNvPr id="5" name="">
             <a:extLst xmlns:a="http://schemas.openxmlformats.org/drawingml/2006/main">
               <a:ext uri="{FF2B5EF4-FFF2-40B4-BE49-F238E27FC236}">
-                <a16:creationId xmlns:a16="http://schemas.microsoft.com/office/drawing/2014/main" id="{BA9BB665-976A-4118-9488-73121FBE8DDB}"/>
+                <a16:creationId xmlns:a16="http://schemas.microsoft.com/office/drawing/2014/main" id="{E2DC9CBF-5C2B-4673-BA8C-5AEECF47C769}"/>
               </a:ext>
             </a:extLst>
           </p:cNvPr>
@@ -12072,7 +12080,7 @@
           <p:cNvPr id="6" name="">
             <a:extLst xmlns:a="http://schemas.openxmlformats.org/drawingml/2006/main">
               <a:ext uri="{FF2B5EF4-FFF2-40B4-BE49-F238E27FC236}">
-                <a16:creationId xmlns:a16="http://schemas.microsoft.com/office/drawing/2014/main" id="{2A4E9D54-92BA-4579-955A-00E625FC8411}"/>
+                <a16:creationId xmlns:a16="http://schemas.microsoft.com/office/drawing/2014/main" id="{ED742478-A33A-4362-8C13-641460FD2026}"/>
               </a:ext>
             </a:extLst>
           </p:cNvPr>
@@ -12129,7 +12137,7 @@
           <p:cNvPr id="7" name="">
             <a:extLst xmlns:a="http://schemas.openxmlformats.org/drawingml/2006/main">
               <a:ext uri="{FF2B5EF4-FFF2-40B4-BE49-F238E27FC236}">
-                <a16:creationId xmlns:a16="http://schemas.microsoft.com/office/drawing/2014/main" id="{38A9E6C4-49B7-4807-89F1-2D5C220EA808}"/>
+                <a16:creationId xmlns:a16="http://schemas.microsoft.com/office/drawing/2014/main" id="{A3216767-F399-4C6A-875E-B40DF14D9F37}"/>
               </a:ext>
             </a:extLst>
           </p:cNvPr>
@@ -12161,7 +12169,7 @@
           <p:cNvPr id="8" name="">
             <a:extLst xmlns:a="http://schemas.openxmlformats.org/drawingml/2006/main">
               <a:ext uri="{FF2B5EF4-FFF2-40B4-BE49-F238E27FC236}">
-                <a16:creationId xmlns:a16="http://schemas.microsoft.com/office/drawing/2014/main" id="{06702F52-2049-48E0-AFFA-E014479BCB8F}"/>
+                <a16:creationId xmlns:a16="http://schemas.microsoft.com/office/drawing/2014/main" id="{8E42F7D5-7DAE-4543-B98D-9CD1016155FA}"/>
               </a:ext>
             </a:extLst>
           </p:cNvPr>
@@ -12218,7 +12226,7 @@
           <p:cNvPr id="9" name="">
             <a:extLst xmlns:a="http://schemas.openxmlformats.org/drawingml/2006/main">
               <a:ext uri="{FF2B5EF4-FFF2-40B4-BE49-F238E27FC236}">
-                <a16:creationId xmlns:a16="http://schemas.microsoft.com/office/drawing/2014/main" id="{054F07E9-49CC-4271-89E6-42ABC5E55F89}"/>
+                <a16:creationId xmlns:a16="http://schemas.microsoft.com/office/drawing/2014/main" id="{71AB6483-ED74-48FA-8EBF-60635A1CFB58}"/>
               </a:ext>
             </a:extLst>
           </p:cNvPr>
@@ -12275,7 +12283,7 @@
           <p:cNvPr id="10" name="">
             <a:extLst xmlns:a="http://schemas.openxmlformats.org/drawingml/2006/main">
               <a:ext uri="{FF2B5EF4-FFF2-40B4-BE49-F238E27FC236}">
-                <a16:creationId xmlns:a16="http://schemas.microsoft.com/office/drawing/2014/main" id="{2DF39465-BF13-471D-85F5-B156591F8A19}"/>
+                <a16:creationId xmlns:a16="http://schemas.microsoft.com/office/drawing/2014/main" id="{7CD81FC5-F0CB-4140-B6C4-33837F229E13}"/>
               </a:ext>
             </a:extLst>
           </p:cNvPr>
@@ -12309,7 +12317,7 @@
           <p:cNvPr id="11" name="">
             <a:extLst xmlns:a="http://schemas.openxmlformats.org/drawingml/2006/main">
               <a:ext uri="{FF2B5EF4-FFF2-40B4-BE49-F238E27FC236}">
-                <a16:creationId xmlns:a16="http://schemas.microsoft.com/office/drawing/2014/main" id="{39DDD235-5E57-46C4-B76C-8D774B332BF2}"/>
+                <a16:creationId xmlns:a16="http://schemas.microsoft.com/office/drawing/2014/main" id="{1A1334C2-5D5C-4ED5-A5F3-C7DC5D34BB5E}"/>
               </a:ext>
             </a:extLst>
           </p:cNvPr>
@@ -12341,7 +12349,7 @@
           <p:cNvPr id="12" name="">
             <a:extLst xmlns:a="http://schemas.openxmlformats.org/drawingml/2006/main">
               <a:ext uri="{FF2B5EF4-FFF2-40B4-BE49-F238E27FC236}">
-                <a16:creationId xmlns:a16="http://schemas.microsoft.com/office/drawing/2014/main" id="{47977043-91A9-42D5-9582-EEEE6B96A1A2}"/>
+                <a16:creationId xmlns:a16="http://schemas.microsoft.com/office/drawing/2014/main" id="{1F48FA59-E4C2-475B-8D5C-B91F6572FCE0}"/>
               </a:ext>
             </a:extLst>
           </p:cNvPr>
@@ -12398,7 +12406,7 @@
           <p:cNvPr id="13" name="">
             <a:extLst xmlns:a="http://schemas.openxmlformats.org/drawingml/2006/main">
               <a:ext uri="{FF2B5EF4-FFF2-40B4-BE49-F238E27FC236}">
-                <a16:creationId xmlns:a16="http://schemas.microsoft.com/office/drawing/2014/main" id="{D0D2D401-B901-4636-997F-1EF779C7E526}"/>
+                <a16:creationId xmlns:a16="http://schemas.microsoft.com/office/drawing/2014/main" id="{4325F8A5-F75D-4D2C-AD32-BD6C747274F8}"/>
               </a:ext>
             </a:extLst>
           </p:cNvPr>
@@ -12455,7 +12463,7 @@
           <p:cNvPr id="14" name="">
             <a:extLst xmlns:a="http://schemas.openxmlformats.org/drawingml/2006/main">
               <a:ext uri="{FF2B5EF4-FFF2-40B4-BE49-F238E27FC236}">
-                <a16:creationId xmlns:a16="http://schemas.microsoft.com/office/drawing/2014/main" id="{5ABB3157-5A13-4B71-99DF-9E19BCCF870F}"/>
+                <a16:creationId xmlns:a16="http://schemas.microsoft.com/office/drawing/2014/main" id="{47EDF01A-5562-4834-8C14-32AD7D5D4ACE}"/>
               </a:ext>
             </a:extLst>
           </p:cNvPr>
@@ -12489,7 +12497,7 @@
           <p:cNvPr id="15" name="">
             <a:extLst xmlns:a="http://schemas.openxmlformats.org/drawingml/2006/main">
               <a:ext uri="{FF2B5EF4-FFF2-40B4-BE49-F238E27FC236}">
-                <a16:creationId xmlns:a16="http://schemas.microsoft.com/office/drawing/2014/main" id="{A6C6C350-CC31-4CB7-A382-9FA9348F6723}"/>
+                <a16:creationId xmlns:a16="http://schemas.microsoft.com/office/drawing/2014/main" id="{D1DA65DE-3016-4657-9225-D5C1E4C0A350}"/>
               </a:ext>
             </a:extLst>
           </p:cNvPr>
@@ -12521,7 +12529,7 @@
           <p:cNvPr id="16" name="">
             <a:extLst xmlns:a="http://schemas.openxmlformats.org/drawingml/2006/main">
               <a:ext uri="{FF2B5EF4-FFF2-40B4-BE49-F238E27FC236}">
-                <a16:creationId xmlns:a16="http://schemas.microsoft.com/office/drawing/2014/main" id="{A44BADB0-5A48-4172-A591-4540EACA797C}"/>
+                <a16:creationId xmlns:a16="http://schemas.microsoft.com/office/drawing/2014/main" id="{5D78D47D-CE1A-4E96-873E-F13C9BB36883}"/>
               </a:ext>
             </a:extLst>
           </p:cNvPr>
@@ -12578,7 +12586,7 @@
           <p:cNvPr id="17" name="">
             <a:extLst xmlns:a="http://schemas.openxmlformats.org/drawingml/2006/main">
               <a:ext uri="{FF2B5EF4-FFF2-40B4-BE49-F238E27FC236}">
-                <a16:creationId xmlns:a16="http://schemas.microsoft.com/office/drawing/2014/main" id="{2444EAF1-5B75-488B-8920-03D15542B4D5}"/>
+                <a16:creationId xmlns:a16="http://schemas.microsoft.com/office/drawing/2014/main" id="{1E2DB26B-CA6B-4005-BE4A-13749DA55459}"/>
               </a:ext>
             </a:extLst>
           </p:cNvPr>
@@ -12635,7 +12643,7 @@
           <p:cNvPr id="18" name="">
             <a:extLst xmlns:a="http://schemas.openxmlformats.org/drawingml/2006/main">
               <a:ext uri="{FF2B5EF4-FFF2-40B4-BE49-F238E27FC236}">
-                <a16:creationId xmlns:a16="http://schemas.microsoft.com/office/drawing/2014/main" id="{39EFB53D-64C5-4DBD-9F33-7EA061D7C331}"/>
+                <a16:creationId xmlns:a16="http://schemas.microsoft.com/office/drawing/2014/main" id="{3CC319B2-5341-4F1B-BFEE-033549C82400}"/>
               </a:ext>
             </a:extLst>
           </p:cNvPr>
@@ -12669,7 +12677,7 @@
           <p:cNvPr id="19" name="">
             <a:extLst xmlns:a="http://schemas.openxmlformats.org/drawingml/2006/main">
               <a:ext uri="{FF2B5EF4-FFF2-40B4-BE49-F238E27FC236}">
-                <a16:creationId xmlns:a16="http://schemas.microsoft.com/office/drawing/2014/main" id="{79D40E8E-5B9A-439C-AB7C-53BBE9B98987}"/>
+                <a16:creationId xmlns:a16="http://schemas.microsoft.com/office/drawing/2014/main" id="{B75AB964-15FA-4C8E-85C9-8485C9D6FD3B}"/>
               </a:ext>
             </a:extLst>
           </p:cNvPr>
@@ -12701,7 +12709,7 @@
           <p:cNvPr id="20" name="">
             <a:extLst xmlns:a="http://schemas.openxmlformats.org/drawingml/2006/main">
               <a:ext uri="{FF2B5EF4-FFF2-40B4-BE49-F238E27FC236}">
-                <a16:creationId xmlns:a16="http://schemas.microsoft.com/office/drawing/2014/main" id="{755136E5-AA5E-4ADF-9CD6-51372BFED071}"/>
+                <a16:creationId xmlns:a16="http://schemas.microsoft.com/office/drawing/2014/main" id="{659DA5A4-FF09-4C34-9FD6-8825BFE623DE}"/>
               </a:ext>
             </a:extLst>
           </p:cNvPr>
@@ -12758,7 +12766,7 @@
           <p:cNvPr id="21" name="">
             <a:extLst xmlns:a="http://schemas.openxmlformats.org/drawingml/2006/main">
               <a:ext uri="{FF2B5EF4-FFF2-40B4-BE49-F238E27FC236}">
-                <a16:creationId xmlns:a16="http://schemas.microsoft.com/office/drawing/2014/main" id="{1244E071-CB2B-49F9-9080-60B9284A9A16}"/>
+                <a16:creationId xmlns:a16="http://schemas.microsoft.com/office/drawing/2014/main" id="{26D72C27-6820-4BB7-B914-168F89981ECE}"/>
               </a:ext>
             </a:extLst>
           </p:cNvPr>
@@ -12815,7 +12823,7 @@
           <p:cNvPr id="22" name="">
             <a:extLst xmlns:a="http://schemas.openxmlformats.org/drawingml/2006/main">
               <a:ext uri="{FF2B5EF4-FFF2-40B4-BE49-F238E27FC236}">
-                <a16:creationId xmlns:a16="http://schemas.microsoft.com/office/drawing/2014/main" id="{C92C1BA5-AAA7-43AB-A52B-2987106D56A9}"/>
+                <a16:creationId xmlns:a16="http://schemas.microsoft.com/office/drawing/2014/main" id="{B961CC96-0A37-4F0A-AE8B-DC750B6B6B24}"/>
               </a:ext>
             </a:extLst>
           </p:cNvPr>
@@ -12870,7 +12878,7 @@
     </p:spTree>
     <p:extLst>
       <p:ext uri="{BB962C8B-B14F-4D97-AF65-F5344CB8AC3E}">
-        <p14:creationId xmlns:p14="http://schemas.microsoft.com/office/powerpoint/2010/main" val="1036952679"/>
+        <p14:creationId xmlns:p14="http://schemas.microsoft.com/office/powerpoint/2010/main" val="333417203"/>
       </p:ext>
     </p:extLst>
   </p:cSld>
@@ -13071,7 +13079,7 @@
           <p:cNvPr id="22" name="">
             <a:extLst xmlns:a="http://schemas.openxmlformats.org/drawingml/2006/main">
               <a:ext uri="{FF2B5EF4-FFF2-40B4-BE49-F238E27FC236}">
-                <a16:creationId xmlns:a16="http://schemas.microsoft.com/office/drawing/2014/main" id="{8660C733-D304-4F5C-91C9-50922583F216}"/>
+                <a16:creationId xmlns:a16="http://schemas.microsoft.com/office/drawing/2014/main" id="{A35343AC-C9F6-45A0-BE23-950EDF697B54}"/>
               </a:ext>
             </a:extLst>
           </p:cNvPr>
@@ -13103,7 +13111,7 @@
           <p:cNvPr id="2" name="">
             <a:extLst xmlns:a="http://schemas.openxmlformats.org/drawingml/2006/main">
               <a:ext uri="{FF2B5EF4-FFF2-40B4-BE49-F238E27FC236}">
-                <a16:creationId xmlns:a16="http://schemas.microsoft.com/office/drawing/2014/main" id="{549F4FA7-5D86-4D47-8B67-3BE52CB38F2D}"/>
+                <a16:creationId xmlns:a16="http://schemas.microsoft.com/office/drawing/2014/main" id="{45B6ECBE-7C77-467E-A95B-E5FDF89DC6A5}"/>
               </a:ext>
             </a:extLst>
           </p:cNvPr>
@@ -13160,7 +13168,7 @@
           <p:cNvPr id="3" name="">
             <a:extLst xmlns:a="http://schemas.openxmlformats.org/drawingml/2006/main">
               <a:ext uri="{FF2B5EF4-FFF2-40B4-BE49-F238E27FC236}">
-                <a16:creationId xmlns:a16="http://schemas.microsoft.com/office/drawing/2014/main" id="{71237F91-85EB-4AD7-BDBB-F2C1477B3933}"/>
+                <a16:creationId xmlns:a16="http://schemas.microsoft.com/office/drawing/2014/main" id="{17F6DA31-F69D-424D-9B9E-D82F77D50649}"/>
               </a:ext>
             </a:extLst>
           </p:cNvPr>
@@ -13192,7 +13200,7 @@
           <p:cNvPr id="4" name="">
             <a:extLst xmlns:a="http://schemas.openxmlformats.org/drawingml/2006/main">
               <a:ext uri="{FF2B5EF4-FFF2-40B4-BE49-F238E27FC236}">
-                <a16:creationId xmlns:a16="http://schemas.microsoft.com/office/drawing/2014/main" id="{FB8CB842-3475-4CFE-AB01-DA80F6007BA9}"/>
+                <a16:creationId xmlns:a16="http://schemas.microsoft.com/office/drawing/2014/main" id="{032F8156-EE8A-407B-9DEE-6F5BC6D8B0DE}"/>
               </a:ext>
             </a:extLst>
           </p:cNvPr>
@@ -13249,7 +13257,7 @@
           <p:cNvPr id="5" name="">
             <a:extLst xmlns:a="http://schemas.openxmlformats.org/drawingml/2006/main">
               <a:ext uri="{FF2B5EF4-FFF2-40B4-BE49-F238E27FC236}">
-                <a16:creationId xmlns:a16="http://schemas.microsoft.com/office/drawing/2014/main" id="{A0D4BC58-7F91-437B-B812-216CE3290559}"/>
+                <a16:creationId xmlns:a16="http://schemas.microsoft.com/office/drawing/2014/main" id="{242505F7-B502-4B66-A59E-F099682A4AE3}"/>
               </a:ext>
             </a:extLst>
           </p:cNvPr>
@@ -13306,7 +13314,7 @@
           <p:cNvPr id="6" name="">
             <a:extLst xmlns:a="http://schemas.openxmlformats.org/drawingml/2006/main">
               <a:ext uri="{FF2B5EF4-FFF2-40B4-BE49-F238E27FC236}">
-                <a16:creationId xmlns:a16="http://schemas.microsoft.com/office/drawing/2014/main" id="{EB8E83F2-69BD-4BFE-9C81-4252D4FB1526}"/>
+                <a16:creationId xmlns:a16="http://schemas.microsoft.com/office/drawing/2014/main" id="{40020A26-FF29-4E5A-9E84-CB6540A3ED1E}"/>
               </a:ext>
             </a:extLst>
           </p:cNvPr>
@@ -13363,7 +13371,7 @@
           <p:cNvPr id="7" name="">
             <a:extLst xmlns:a="http://schemas.openxmlformats.org/drawingml/2006/main">
               <a:ext uri="{FF2B5EF4-FFF2-40B4-BE49-F238E27FC236}">
-                <a16:creationId xmlns:a16="http://schemas.microsoft.com/office/drawing/2014/main" id="{F1FCAA9C-C8CE-4BBF-9852-398C7545D081}"/>
+                <a16:creationId xmlns:a16="http://schemas.microsoft.com/office/drawing/2014/main" id="{6AB9A0CC-26CE-4247-8D4D-22CB7CF9FB1A}"/>
               </a:ext>
             </a:extLst>
           </p:cNvPr>
@@ -13395,7 +13403,7 @@
           <p:cNvPr id="8" name="">
             <a:extLst xmlns:a="http://schemas.openxmlformats.org/drawingml/2006/main">
               <a:ext uri="{FF2B5EF4-FFF2-40B4-BE49-F238E27FC236}">
-                <a16:creationId xmlns:a16="http://schemas.microsoft.com/office/drawing/2014/main" id="{8DDD87B3-8DD6-4596-AF08-101C53B0C0F1}"/>
+                <a16:creationId xmlns:a16="http://schemas.microsoft.com/office/drawing/2014/main" id="{FA40FB39-A410-4E4C-B510-00AE2330621C}"/>
               </a:ext>
             </a:extLst>
           </p:cNvPr>
@@ -13452,7 +13460,7 @@
           <p:cNvPr id="9" name="">
             <a:extLst xmlns:a="http://schemas.openxmlformats.org/drawingml/2006/main">
               <a:ext uri="{FF2B5EF4-FFF2-40B4-BE49-F238E27FC236}">
-                <a16:creationId xmlns:a16="http://schemas.microsoft.com/office/drawing/2014/main" id="{6E4BED80-C484-4095-9745-B088274E6554}"/>
+                <a16:creationId xmlns:a16="http://schemas.microsoft.com/office/drawing/2014/main" id="{392E316B-75C0-4B29-9030-8CB8EB629E09}"/>
               </a:ext>
             </a:extLst>
           </p:cNvPr>
@@ -13509,7 +13517,7 @@
           <p:cNvPr id="10" name="">
             <a:extLst xmlns:a="http://schemas.openxmlformats.org/drawingml/2006/main">
               <a:ext uri="{FF2B5EF4-FFF2-40B4-BE49-F238E27FC236}">
-                <a16:creationId xmlns:a16="http://schemas.microsoft.com/office/drawing/2014/main" id="{CE611B29-A617-4BE5-9E57-BC9EA4747340}"/>
+                <a16:creationId xmlns:a16="http://schemas.microsoft.com/office/drawing/2014/main" id="{0BF94745-94CB-4A37-AEFD-668650746E5B}"/>
               </a:ext>
             </a:extLst>
           </p:cNvPr>
@@ -13543,7 +13551,7 @@
           <p:cNvPr id="11" name="">
             <a:extLst xmlns:a="http://schemas.openxmlformats.org/drawingml/2006/main">
               <a:ext uri="{FF2B5EF4-FFF2-40B4-BE49-F238E27FC236}">
-                <a16:creationId xmlns:a16="http://schemas.microsoft.com/office/drawing/2014/main" id="{CFD6CE58-14C1-4CD3-BE55-CC12C8E053F9}"/>
+                <a16:creationId xmlns:a16="http://schemas.microsoft.com/office/drawing/2014/main" id="{A7DF651B-4C2E-4D67-9259-A6ACCBA43D97}"/>
               </a:ext>
             </a:extLst>
           </p:cNvPr>
@@ -13575,7 +13583,7 @@
           <p:cNvPr id="12" name="">
             <a:extLst xmlns:a="http://schemas.openxmlformats.org/drawingml/2006/main">
               <a:ext uri="{FF2B5EF4-FFF2-40B4-BE49-F238E27FC236}">
-                <a16:creationId xmlns:a16="http://schemas.microsoft.com/office/drawing/2014/main" id="{902599AE-FB80-4DC0-9886-0F5041C367CF}"/>
+                <a16:creationId xmlns:a16="http://schemas.microsoft.com/office/drawing/2014/main" id="{67248A26-4784-49F1-B7CD-114471A65D5C}"/>
               </a:ext>
             </a:extLst>
           </p:cNvPr>
@@ -13632,7 +13640,7 @@
           <p:cNvPr id="13" name="">
             <a:extLst xmlns:a="http://schemas.openxmlformats.org/drawingml/2006/main">
               <a:ext uri="{FF2B5EF4-FFF2-40B4-BE49-F238E27FC236}">
-                <a16:creationId xmlns:a16="http://schemas.microsoft.com/office/drawing/2014/main" id="{3D711CA0-3EEA-4227-AE28-1953A139B2B5}"/>
+                <a16:creationId xmlns:a16="http://schemas.microsoft.com/office/drawing/2014/main" id="{B555A1CA-03CF-4935-8F66-53AACA127AAB}"/>
               </a:ext>
             </a:extLst>
           </p:cNvPr>
@@ -13689,7 +13697,7 @@
           <p:cNvPr id="14" name="">
             <a:extLst xmlns:a="http://schemas.openxmlformats.org/drawingml/2006/main">
               <a:ext uri="{FF2B5EF4-FFF2-40B4-BE49-F238E27FC236}">
-                <a16:creationId xmlns:a16="http://schemas.microsoft.com/office/drawing/2014/main" id="{BB2F578F-CFE6-4A58-A898-B333B05B59DE}"/>
+                <a16:creationId xmlns:a16="http://schemas.microsoft.com/office/drawing/2014/main" id="{18A214FA-2E92-4EEA-A545-7C0A74DEB3F9}"/>
               </a:ext>
             </a:extLst>
           </p:cNvPr>
@@ -13723,7 +13731,7 @@
           <p:cNvPr id="15" name="">
             <a:extLst xmlns:a="http://schemas.openxmlformats.org/drawingml/2006/main">
               <a:ext uri="{FF2B5EF4-FFF2-40B4-BE49-F238E27FC236}">
-                <a16:creationId xmlns:a16="http://schemas.microsoft.com/office/drawing/2014/main" id="{6EA32EFD-822A-4977-B917-68176BAE8653}"/>
+                <a16:creationId xmlns:a16="http://schemas.microsoft.com/office/drawing/2014/main" id="{67E363B0-143A-4E14-9976-DC67C0A98807}"/>
               </a:ext>
             </a:extLst>
           </p:cNvPr>
@@ -13755,7 +13763,7 @@
           <p:cNvPr id="16" name="">
             <a:extLst xmlns:a="http://schemas.openxmlformats.org/drawingml/2006/main">
               <a:ext uri="{FF2B5EF4-FFF2-40B4-BE49-F238E27FC236}">
-                <a16:creationId xmlns:a16="http://schemas.microsoft.com/office/drawing/2014/main" id="{D69F8A00-89ED-4237-9CD8-E99868E85D1E}"/>
+                <a16:creationId xmlns:a16="http://schemas.microsoft.com/office/drawing/2014/main" id="{7D36714F-8FCE-4BC4-BCBA-A42AD6BAF32C}"/>
               </a:ext>
             </a:extLst>
           </p:cNvPr>
@@ -13812,7 +13820,7 @@
           <p:cNvPr id="17" name="">
             <a:extLst xmlns:a="http://schemas.openxmlformats.org/drawingml/2006/main">
               <a:ext uri="{FF2B5EF4-FFF2-40B4-BE49-F238E27FC236}">
-                <a16:creationId xmlns:a16="http://schemas.microsoft.com/office/drawing/2014/main" id="{B4CA5B1F-D1C5-4318-86A5-7DFDE9A8B96A}"/>
+                <a16:creationId xmlns:a16="http://schemas.microsoft.com/office/drawing/2014/main" id="{FD0D8244-43AB-46BA-B96F-83031D9FBEFF}"/>
               </a:ext>
             </a:extLst>
           </p:cNvPr>
@@ -13869,7 +13877,7 @@
           <p:cNvPr id="18" name="">
             <a:extLst xmlns:a="http://schemas.openxmlformats.org/drawingml/2006/main">
               <a:ext uri="{FF2B5EF4-FFF2-40B4-BE49-F238E27FC236}">
-                <a16:creationId xmlns:a16="http://schemas.microsoft.com/office/drawing/2014/main" id="{FED16E32-3ED2-4D08-9DA0-30188EE22AAE}"/>
+                <a16:creationId xmlns:a16="http://schemas.microsoft.com/office/drawing/2014/main" id="{B441E8E8-6F2A-4DB3-A251-51523914AB29}"/>
               </a:ext>
             </a:extLst>
           </p:cNvPr>
@@ -13903,7 +13911,7 @@
           <p:cNvPr id="19" name="">
             <a:extLst xmlns:a="http://schemas.openxmlformats.org/drawingml/2006/main">
               <a:ext uri="{FF2B5EF4-FFF2-40B4-BE49-F238E27FC236}">
-                <a16:creationId xmlns:a16="http://schemas.microsoft.com/office/drawing/2014/main" id="{20C3D2D2-FA84-4F63-9652-5EA06465A9ED}"/>
+                <a16:creationId xmlns:a16="http://schemas.microsoft.com/office/drawing/2014/main" id="{1D012A46-3DE2-47A0-964A-2C5934839C31}"/>
               </a:ext>
             </a:extLst>
           </p:cNvPr>
@@ -13935,7 +13943,7 @@
           <p:cNvPr id="20" name="">
             <a:extLst xmlns:a="http://schemas.openxmlformats.org/drawingml/2006/main">
               <a:ext uri="{FF2B5EF4-FFF2-40B4-BE49-F238E27FC236}">
-                <a16:creationId xmlns:a16="http://schemas.microsoft.com/office/drawing/2014/main" id="{CBDBD97C-5366-4429-A87B-5DB1D5C6AC6B}"/>
+                <a16:creationId xmlns:a16="http://schemas.microsoft.com/office/drawing/2014/main" id="{259EEF11-9F5B-491F-A97C-FFF44663578B}"/>
               </a:ext>
             </a:extLst>
           </p:cNvPr>
@@ -13992,7 +14000,7 @@
           <p:cNvPr id="21" name="">
             <a:extLst xmlns:a="http://schemas.openxmlformats.org/drawingml/2006/main">
               <a:ext uri="{FF2B5EF4-FFF2-40B4-BE49-F238E27FC236}">
-                <a16:creationId xmlns:a16="http://schemas.microsoft.com/office/drawing/2014/main" id="{0D34C715-811C-4622-B882-2E2D7571012A}"/>
+                <a16:creationId xmlns:a16="http://schemas.microsoft.com/office/drawing/2014/main" id="{D8028160-F0BC-4FC3-80DD-99542688189C}"/>
               </a:ext>
             </a:extLst>
           </p:cNvPr>
@@ -14047,7 +14055,7 @@
     </p:spTree>
     <p:extLst>
       <p:ext uri="{BB962C8B-B14F-4D97-AF65-F5344CB8AC3E}">
-        <p14:creationId xmlns:p14="http://schemas.microsoft.com/office/powerpoint/2010/main" val="688497946"/>
+        <p14:creationId xmlns:p14="http://schemas.microsoft.com/office/powerpoint/2010/main" val="442734708"/>
       </p:ext>
     </p:extLst>
   </p:cSld>
